--- a/reference_content/Slides/pytorch_intro.pptx
+++ b/reference_content/Slides/pytorch_intro.pptx
@@ -20,48 +20,40 @@
     <p:sldId id="295" r:id="rId14"/>
     <p:sldId id="296" r:id="rId15"/>
     <p:sldId id="297" r:id="rId16"/>
-    <p:sldId id="257" r:id="rId17"/>
-    <p:sldId id="258" r:id="rId18"/>
-    <p:sldId id="281" r:id="rId19"/>
-    <p:sldId id="323" r:id="rId20"/>
-    <p:sldId id="259" r:id="rId21"/>
-    <p:sldId id="282" r:id="rId22"/>
-    <p:sldId id="287" r:id="rId23"/>
-    <p:sldId id="324" r:id="rId24"/>
-    <p:sldId id="298" r:id="rId25"/>
-    <p:sldId id="299" r:id="rId26"/>
-    <p:sldId id="304" r:id="rId27"/>
-    <p:sldId id="305" r:id="rId28"/>
-    <p:sldId id="300" r:id="rId29"/>
-    <p:sldId id="301" r:id="rId30"/>
-    <p:sldId id="311" r:id="rId31"/>
-    <p:sldId id="302" r:id="rId32"/>
-    <p:sldId id="303" r:id="rId33"/>
-    <p:sldId id="338" r:id="rId34"/>
-    <p:sldId id="306" r:id="rId35"/>
-    <p:sldId id="309" r:id="rId36"/>
-    <p:sldId id="331" r:id="rId37"/>
-    <p:sldId id="329" r:id="rId38"/>
-    <p:sldId id="325" r:id="rId39"/>
-    <p:sldId id="326" r:id="rId40"/>
-    <p:sldId id="307" r:id="rId41"/>
-    <p:sldId id="308" r:id="rId42"/>
-    <p:sldId id="327" r:id="rId43"/>
-    <p:sldId id="332" r:id="rId44"/>
-    <p:sldId id="333" r:id="rId45"/>
-    <p:sldId id="334" r:id="rId46"/>
-    <p:sldId id="310" r:id="rId47"/>
-    <p:sldId id="312" r:id="rId48"/>
-    <p:sldId id="321" r:id="rId49"/>
-    <p:sldId id="339" r:id="rId50"/>
-    <p:sldId id="316" r:id="rId51"/>
-    <p:sldId id="315" r:id="rId52"/>
-    <p:sldId id="317" r:id="rId53"/>
-    <p:sldId id="319" r:id="rId54"/>
-    <p:sldId id="320" r:id="rId55"/>
-    <p:sldId id="328" r:id="rId56"/>
-    <p:sldId id="335" r:id="rId57"/>
-    <p:sldId id="318" r:id="rId58"/>
+    <p:sldId id="298" r:id="rId17"/>
+    <p:sldId id="299" r:id="rId18"/>
+    <p:sldId id="304" r:id="rId19"/>
+    <p:sldId id="305" r:id="rId20"/>
+    <p:sldId id="300" r:id="rId21"/>
+    <p:sldId id="301" r:id="rId22"/>
+    <p:sldId id="311" r:id="rId23"/>
+    <p:sldId id="302" r:id="rId24"/>
+    <p:sldId id="303" r:id="rId25"/>
+    <p:sldId id="338" r:id="rId26"/>
+    <p:sldId id="306" r:id="rId27"/>
+    <p:sldId id="309" r:id="rId28"/>
+    <p:sldId id="331" r:id="rId29"/>
+    <p:sldId id="329" r:id="rId30"/>
+    <p:sldId id="325" r:id="rId31"/>
+    <p:sldId id="326" r:id="rId32"/>
+    <p:sldId id="307" r:id="rId33"/>
+    <p:sldId id="308" r:id="rId34"/>
+    <p:sldId id="327" r:id="rId35"/>
+    <p:sldId id="332" r:id="rId36"/>
+    <p:sldId id="333" r:id="rId37"/>
+    <p:sldId id="334" r:id="rId38"/>
+    <p:sldId id="310" r:id="rId39"/>
+    <p:sldId id="312" r:id="rId40"/>
+    <p:sldId id="321" r:id="rId41"/>
+    <p:sldId id="339" r:id="rId42"/>
+    <p:sldId id="316" r:id="rId43"/>
+    <p:sldId id="315" r:id="rId44"/>
+    <p:sldId id="317" r:id="rId45"/>
+    <p:sldId id="319" r:id="rId46"/>
+    <p:sldId id="320" r:id="rId47"/>
+    <p:sldId id="328" r:id="rId48"/>
+    <p:sldId id="335" r:id="rId49"/>
+    <p:sldId id="318" r:id="rId50"/>
   </p:sldIdLst>
   <p:sldSz cx="12192000" cy="6858000"/>
   <p:notesSz cx="6858000" cy="9144000"/>
@@ -191,16 +183,7 @@
           </p14:sldIdLst>
         </p14:section>
         <p14:section name="Keras and TF" id="{2B08B239-A34C-3D4A-8C5C-267FDC49D3B2}">
-          <p14:sldIdLst>
-            <p14:sldId id="257"/>
-            <p14:sldId id="258"/>
-            <p14:sldId id="281"/>
-            <p14:sldId id="323"/>
-            <p14:sldId id="259"/>
-            <p14:sldId id="282"/>
-            <p14:sldId id="287"/>
-            <p14:sldId id="324"/>
-          </p14:sldIdLst>
+          <p14:sldIdLst/>
         </p14:section>
         <p14:section name="Creating PyTorch Models" id="{B2A59B99-3664-E04B-A63C-895C7D2DE19B}">
           <p14:sldIdLst>
@@ -3870,6 +3853,20 @@
           <a:p>
             <a:r>
               <a:rPr lang="en-US" dirty="0"/>
+              <a:t>Using </a:t>
+            </a:r>
+            <a:r>
+              <a:rPr lang="en-US" dirty="0" err="1"/>
+              <a:t>colab</a:t>
+            </a:r>
+            <a:r>
+              <a:rPr lang="en-US" dirty="0"/>
+              <a:t> for the GPU. </a:t>
+            </a:r>
+          </a:p>
+          <a:p>
+            <a:r>
+              <a:rPr lang="en-US" dirty="0"/>
               <a:t>Basics of </a:t>
             </a:r>
             <a:r>
@@ -3899,7 +3896,7 @@
             <a:pPr lvl="1"/>
             <a:r>
               <a:rPr lang="en-US" dirty="0"/>
-              <a:t>Basic optimization options – early stopping, dropout, regularization. We’ll tune more next time.</a:t>
+              <a:t>Next week we’ll do more on data and tuning. </a:t>
             </a:r>
           </a:p>
           <a:p>
@@ -4980,714 +4977,6 @@
 </file>
 
 <file path=ppt/slides/slide16.xml><?xml version="1.0" encoding="utf-8"?>
-<p:sld xmlns:a="http://schemas.openxmlformats.org/drawingml/2006/main" xmlns:r="http://schemas.openxmlformats.org/officeDocument/2006/relationships" xmlns:p="http://schemas.openxmlformats.org/presentationml/2006/main" show="0">
-  <p:cSld>
-    <p:spTree>
-      <p:nvGrpSpPr>
-        <p:cNvPr id="1" name=""/>
-        <p:cNvGrpSpPr/>
-        <p:nvPr/>
-      </p:nvGrpSpPr>
-      <p:grpSpPr>
-        <a:xfrm>
-          <a:off x="0" y="0"/>
-          <a:ext cx="0" cy="0"/>
-          <a:chOff x="0" y="0"/>
-          <a:chExt cx="0" cy="0"/>
-        </a:xfrm>
-      </p:grpSpPr>
-      <p:sp>
-        <p:nvSpPr>
-          <p:cNvPr id="2" name="Title 1">
-            <a:extLst>
-              <a:ext uri="{FF2B5EF4-FFF2-40B4-BE49-F238E27FC236}">
-                <a16:creationId xmlns:a16="http://schemas.microsoft.com/office/drawing/2014/main" id="{73917772-913D-7E47-AC5A-42F323B81239}"/>
-              </a:ext>
-            </a:extLst>
-          </p:cNvPr>
-          <p:cNvSpPr>
-            <a:spLocks noGrp="1"/>
-          </p:cNvSpPr>
-          <p:nvPr>
-            <p:ph type="title"/>
-          </p:nvPr>
-        </p:nvSpPr>
-        <p:spPr/>
-        <p:txBody>
-          <a:bodyPr/>
-          <a:lstStyle/>
-          <a:p>
-            <a:r>
-              <a:rPr lang="en-US" dirty="0"/>
-              <a:t>Introduction to </a:t>
-            </a:r>
-            <a:r>
-              <a:rPr lang="en-US" dirty="0" err="1"/>
-              <a:t>Tensorflow</a:t>
-            </a:r>
-            <a:endParaRPr lang="en-US" dirty="0"/>
-          </a:p>
-        </p:txBody>
-      </p:sp>
-      <p:sp>
-        <p:nvSpPr>
-          <p:cNvPr id="3" name="Content Placeholder 2">
-            <a:extLst>
-              <a:ext uri="{FF2B5EF4-FFF2-40B4-BE49-F238E27FC236}">
-                <a16:creationId xmlns:a16="http://schemas.microsoft.com/office/drawing/2014/main" id="{1ACB1C0C-A4C8-784F-A370-49BEF3256FE7}"/>
-              </a:ext>
-            </a:extLst>
-          </p:cNvPr>
-          <p:cNvSpPr>
-            <a:spLocks noGrp="1"/>
-          </p:cNvSpPr>
-          <p:nvPr>
-            <p:ph idx="1"/>
-          </p:nvPr>
-        </p:nvSpPr>
-        <p:spPr>
-          <a:xfrm>
-            <a:off x="2418409" y="2015732"/>
-            <a:ext cx="9773591" cy="4037749"/>
-          </a:xfrm>
-        </p:spPr>
-        <p:txBody>
-          <a:bodyPr>
-            <a:normAutofit/>
-          </a:bodyPr>
-          <a:lstStyle/>
-          <a:p>
-            <a:r>
-              <a:rPr lang="en-US" dirty="0"/>
-              <a:t>Just like </a:t>
-            </a:r>
-            <a:r>
-              <a:rPr lang="en-US" dirty="0" err="1"/>
-              <a:t>sklearn</a:t>
-            </a:r>
-            <a:r>
-              <a:rPr lang="en-US" dirty="0"/>
-              <a:t> provides a library of predictive models, </a:t>
-            </a:r>
-            <a:r>
-              <a:rPr lang="en-US" dirty="0" err="1"/>
-              <a:t>tensorflow</a:t>
-            </a:r>
-            <a:r>
-              <a:rPr lang="en-US" dirty="0"/>
-              <a:t> does similar for NN. </a:t>
-            </a:r>
-          </a:p>
-          <a:p>
-            <a:r>
-              <a:rPr lang="en-US" dirty="0" err="1"/>
-              <a:t>Tensorflow</a:t>
-            </a:r>
-            <a:r>
-              <a:rPr lang="en-US" dirty="0"/>
-              <a:t> was developed by Google in 2015, it is free and open source. </a:t>
-            </a:r>
-          </a:p>
-          <a:p>
-            <a:r>
-              <a:rPr lang="en-US" dirty="0"/>
-              <a:t>Uses a graph internally to store the structure of a network. </a:t>
-            </a:r>
-          </a:p>
-          <a:p>
-            <a:r>
-              <a:rPr lang="en-US" dirty="0"/>
-              <a:t>Provides layers, loss functions, </a:t>
-            </a:r>
-            <a:r>
-              <a:rPr lang="en-US" dirty="0" err="1"/>
-              <a:t>etc</a:t>
-            </a:r>
-            <a:r>
-              <a:rPr lang="en-US" dirty="0"/>
-              <a:t>… allowing us to make NNs without coding the innards. </a:t>
-            </a:r>
-          </a:p>
-          <a:p>
-            <a:pPr lvl="1"/>
-            <a:r>
-              <a:rPr lang="en-US" dirty="0"/>
-              <a:t>Calculations are offloaded to C++ modules, which are faster. </a:t>
-            </a:r>
-          </a:p>
-          <a:p>
-            <a:r>
-              <a:rPr lang="en-US" dirty="0"/>
-              <a:t>TensorFlow basically allows you to not do all the math by hand in making a neural network. </a:t>
-            </a:r>
-          </a:p>
-          <a:p>
-            <a:r>
-              <a:rPr lang="en-US" dirty="0"/>
-              <a:t>TensorFlow is still relatively low level (kind of like C vs Python). </a:t>
-            </a:r>
-          </a:p>
-        </p:txBody>
-      </p:sp>
-      <p:pic>
-        <p:nvPicPr>
-          <p:cNvPr id="4098" name="Picture 2" descr="How to Form Graphs in Tensorflow? - GeeksforGeeks">
-            <a:extLst>
-              <a:ext uri="{FF2B5EF4-FFF2-40B4-BE49-F238E27FC236}">
-                <a16:creationId xmlns:a16="http://schemas.microsoft.com/office/drawing/2014/main" id="{A5EE66AE-BBB7-296B-E422-CA66E7319161}"/>
-              </a:ext>
-            </a:extLst>
-          </p:cNvPr>
-          <p:cNvPicPr>
-            <a:picLocks noChangeAspect="1" noChangeArrowheads="1"/>
-          </p:cNvPicPr>
-          <p:nvPr/>
-        </p:nvPicPr>
-        <p:blipFill rotWithShape="1">
-          <a:blip r:embed="rId2">
-            <a:extLst>
-              <a:ext uri="{28A0092B-C50C-407E-A947-70E740481C1C}">
-                <a14:useLocalDpi xmlns:a14="http://schemas.microsoft.com/office/drawing/2010/main" val="0"/>
-              </a:ext>
-            </a:extLst>
-          </a:blip>
-          <a:srcRect l="44300" t="16667" r="22879"/>
-          <a:stretch/>
-        </p:blipFill>
-        <p:spPr bwMode="auto">
-          <a:xfrm>
-            <a:off x="0" y="1853754"/>
-            <a:ext cx="2418409" cy="5038352"/>
-          </a:xfrm>
-          <a:prstGeom prst="rect">
-            <a:avLst/>
-          </a:prstGeom>
-          <a:noFill/>
-          <a:extLst>
-            <a:ext uri="{909E8E84-426E-40DD-AFC4-6F175D3DCCD1}">
-              <a14:hiddenFill xmlns:a14="http://schemas.microsoft.com/office/drawing/2010/main">
-                <a:solidFill>
-                  <a:srgbClr val="FFFFFF"/>
-                </a:solidFill>
-              </a14:hiddenFill>
-            </a:ext>
-          </a:extLst>
-        </p:spPr>
-      </p:pic>
-    </p:spTree>
-    <p:extLst>
-      <p:ext uri="{BB962C8B-B14F-4D97-AF65-F5344CB8AC3E}">
-        <p14:creationId xmlns:p14="http://schemas.microsoft.com/office/powerpoint/2010/main" val="1060517368"/>
-      </p:ext>
-    </p:extLst>
-  </p:cSld>
-  <p:clrMapOvr>
-    <a:masterClrMapping/>
-  </p:clrMapOvr>
-</p:sld>
-</file>
-
-<file path=ppt/slides/slide17.xml><?xml version="1.0" encoding="utf-8"?>
-<p:sld xmlns:a="http://schemas.openxmlformats.org/drawingml/2006/main" xmlns:r="http://schemas.openxmlformats.org/officeDocument/2006/relationships" xmlns:p="http://schemas.openxmlformats.org/presentationml/2006/main" show="0">
-  <p:cSld>
-    <p:spTree>
-      <p:nvGrpSpPr>
-        <p:cNvPr id="1" name=""/>
-        <p:cNvGrpSpPr/>
-        <p:nvPr/>
-      </p:nvGrpSpPr>
-      <p:grpSpPr>
-        <a:xfrm>
-          <a:off x="0" y="0"/>
-          <a:ext cx="0" cy="0"/>
-          <a:chOff x="0" y="0"/>
-          <a:chExt cx="0" cy="0"/>
-        </a:xfrm>
-      </p:grpSpPr>
-      <p:sp>
-        <p:nvSpPr>
-          <p:cNvPr id="2" name="Title 1">
-            <a:extLst>
-              <a:ext uri="{FF2B5EF4-FFF2-40B4-BE49-F238E27FC236}">
-                <a16:creationId xmlns:a16="http://schemas.microsoft.com/office/drawing/2014/main" id="{2DAC92FF-0306-F54E-BD8C-256DB5A002F8}"/>
-              </a:ext>
-            </a:extLst>
-          </p:cNvPr>
-          <p:cNvSpPr>
-            <a:spLocks noGrp="1"/>
-          </p:cNvSpPr>
-          <p:nvPr>
-            <p:ph type="title"/>
-          </p:nvPr>
-        </p:nvSpPr>
-        <p:spPr/>
-        <p:txBody>
-          <a:bodyPr/>
-          <a:lstStyle/>
-          <a:p>
-            <a:r>
-              <a:rPr lang="en-US" dirty="0"/>
-              <a:t>Enter </a:t>
-            </a:r>
-            <a:r>
-              <a:rPr lang="en-US" dirty="0" err="1"/>
-              <a:t>Keras</a:t>
-            </a:r>
-            <a:r>
-              <a:rPr lang="en-US" dirty="0"/>
-              <a:t>…</a:t>
-            </a:r>
-          </a:p>
-        </p:txBody>
-      </p:sp>
-      <p:sp>
-        <p:nvSpPr>
-          <p:cNvPr id="3" name="Content Placeholder 2">
-            <a:extLst>
-              <a:ext uri="{FF2B5EF4-FFF2-40B4-BE49-F238E27FC236}">
-                <a16:creationId xmlns:a16="http://schemas.microsoft.com/office/drawing/2014/main" id="{47F3B658-2C60-064B-88DE-0E1FC3136D5E}"/>
-              </a:ext>
-            </a:extLst>
-          </p:cNvPr>
-          <p:cNvSpPr>
-            <a:spLocks noGrp="1"/>
-          </p:cNvSpPr>
-          <p:nvPr>
-            <p:ph idx="1"/>
-          </p:nvPr>
-        </p:nvSpPr>
-        <p:spPr>
-          <a:xfrm>
-            <a:off x="1451579" y="1853754"/>
-            <a:ext cx="9603275" cy="4301719"/>
-          </a:xfrm>
-        </p:spPr>
-        <p:txBody>
-          <a:bodyPr>
-            <a:normAutofit fontScale="92500" lnSpcReduction="20000"/>
-          </a:bodyPr>
-          <a:lstStyle/>
-          <a:p>
-            <a:r>
-              <a:rPr lang="en-US" dirty="0" err="1"/>
-              <a:t>Keras</a:t>
-            </a:r>
-            <a:r>
-              <a:rPr lang="en-US" dirty="0"/>
-              <a:t> is an even higher-level library that provides an easier API for TF. </a:t>
-            </a:r>
-          </a:p>
-          <a:p>
-            <a:r>
-              <a:rPr lang="en-US" dirty="0"/>
-              <a:t>It’s pretty much all </a:t>
-            </a:r>
-            <a:r>
-              <a:rPr lang="en-US" dirty="0" err="1"/>
-              <a:t>Keras</a:t>
-            </a:r>
-            <a:r>
-              <a:rPr lang="en-US" dirty="0"/>
-              <a:t> now, at least as far as the labeling. </a:t>
-            </a:r>
-          </a:p>
-          <a:p>
-            <a:pPr lvl="1"/>
-            <a:r>
-              <a:rPr lang="en-US" dirty="0"/>
-              <a:t>Originally a separate product, now integrated with the core of TF. </a:t>
-            </a:r>
-          </a:p>
-          <a:p>
-            <a:pPr lvl="1"/>
-            <a:r>
-              <a:rPr lang="en-US" dirty="0" err="1"/>
-              <a:t>Keras</a:t>
-            </a:r>
-            <a:r>
-              <a:rPr lang="en-US" dirty="0"/>
-              <a:t> can be used with other backends like </a:t>
-            </a:r>
-            <a:r>
-              <a:rPr lang="en-US" dirty="0" err="1"/>
-              <a:t>pytorch</a:t>
-            </a:r>
-            <a:r>
-              <a:rPr lang="en-US" dirty="0"/>
-              <a:t>. </a:t>
-            </a:r>
-          </a:p>
-          <a:p>
-            <a:r>
-              <a:rPr lang="en-US" dirty="0"/>
-              <a:t>The good:</a:t>
-            </a:r>
-          </a:p>
-          <a:p>
-            <a:pPr lvl="1"/>
-            <a:r>
-              <a:rPr lang="en-US" dirty="0"/>
-              <a:t>Using </a:t>
-            </a:r>
-            <a:r>
-              <a:rPr lang="en-US" dirty="0" err="1"/>
-              <a:t>Keras</a:t>
-            </a:r>
-            <a:r>
-              <a:rPr lang="en-US" dirty="0"/>
-              <a:t> is relatively easy. </a:t>
-            </a:r>
-          </a:p>
-          <a:p>
-            <a:r>
-              <a:rPr lang="en-US" dirty="0"/>
-              <a:t>The bad:</a:t>
-            </a:r>
-          </a:p>
-          <a:p>
-            <a:pPr lvl="1"/>
-            <a:r>
-              <a:rPr lang="en-US" dirty="0"/>
-              <a:t>Many things may have different names or </a:t>
-            </a:r>
-            <a:r>
-              <a:rPr lang="en-US" dirty="0" err="1"/>
-              <a:t>convetions</a:t>
-            </a:r>
-            <a:r>
-              <a:rPr lang="en-US" dirty="0"/>
-              <a:t> depending where they originated. </a:t>
-            </a:r>
-          </a:p>
-          <a:p>
-            <a:pPr lvl="1"/>
-            <a:r>
-              <a:rPr lang="en-US" dirty="0"/>
-              <a:t>Everything that has changed names since I made this, and made me hate myself. </a:t>
-            </a:r>
-          </a:p>
-          <a:p>
-            <a:r>
-              <a:rPr lang="en-US" dirty="0"/>
-              <a:t>If you need to look something up, Google “</a:t>
-            </a:r>
-            <a:r>
-              <a:rPr lang="en-US" dirty="0" err="1"/>
-              <a:t>Keras</a:t>
-            </a:r>
-            <a:r>
-              <a:rPr lang="en-US" dirty="0"/>
-              <a:t> </a:t>
-            </a:r>
-            <a:r>
-              <a:rPr lang="en-US" dirty="0" err="1"/>
-              <a:t>my_thing</a:t>
-            </a:r>
-            <a:r>
-              <a:rPr lang="en-US" dirty="0"/>
-              <a:t>” and you’ll probably find it. </a:t>
-            </a:r>
-          </a:p>
-          <a:p>
-            <a:r>
-              <a:rPr lang="en-US" dirty="0"/>
-              <a:t>We don’t really need to differentiate between TF/</a:t>
-            </a:r>
-            <a:r>
-              <a:rPr lang="en-US" dirty="0" err="1"/>
-              <a:t>Keras</a:t>
-            </a:r>
-            <a:r>
-              <a:rPr lang="en-US" dirty="0"/>
-              <a:t> most (all??) of the time. </a:t>
-            </a:r>
-          </a:p>
-        </p:txBody>
-      </p:sp>
-    </p:spTree>
-    <p:extLst>
-      <p:ext uri="{BB962C8B-B14F-4D97-AF65-F5344CB8AC3E}">
-        <p14:creationId xmlns:p14="http://schemas.microsoft.com/office/powerpoint/2010/main" val="2691076396"/>
-      </p:ext>
-    </p:extLst>
-  </p:cSld>
-  <p:clrMapOvr>
-    <a:masterClrMapping/>
-  </p:clrMapOvr>
-</p:sld>
-</file>
-
-<file path=ppt/slides/slide18.xml><?xml version="1.0" encoding="utf-8"?>
-<p:sld xmlns:a="http://schemas.openxmlformats.org/drawingml/2006/main" xmlns:r="http://schemas.openxmlformats.org/officeDocument/2006/relationships" xmlns:p="http://schemas.openxmlformats.org/presentationml/2006/main" show="0">
-  <p:cSld>
-    <p:spTree>
-      <p:nvGrpSpPr>
-        <p:cNvPr id="1" name=""/>
-        <p:cNvGrpSpPr/>
-        <p:nvPr/>
-      </p:nvGrpSpPr>
-      <p:grpSpPr>
-        <a:xfrm>
-          <a:off x="0" y="0"/>
-          <a:ext cx="0" cy="0"/>
-          <a:chOff x="0" y="0"/>
-          <a:chExt cx="0" cy="0"/>
-        </a:xfrm>
-      </p:grpSpPr>
-      <p:sp>
-        <p:nvSpPr>
-          <p:cNvPr id="2" name="Title 1">
-            <a:extLst>
-              <a:ext uri="{FF2B5EF4-FFF2-40B4-BE49-F238E27FC236}">
-                <a16:creationId xmlns:a16="http://schemas.microsoft.com/office/drawing/2014/main" id="{7AA6E193-0666-A6EE-31C4-127642CE862E}"/>
-              </a:ext>
-            </a:extLst>
-          </p:cNvPr>
-          <p:cNvSpPr>
-            <a:spLocks noGrp="1"/>
-          </p:cNvSpPr>
-          <p:nvPr>
-            <p:ph type="title"/>
-          </p:nvPr>
-        </p:nvSpPr>
-        <p:spPr/>
-        <p:txBody>
-          <a:bodyPr/>
-          <a:lstStyle/>
-          <a:p>
-            <a:endParaRPr lang="en-US"/>
-          </a:p>
-        </p:txBody>
-      </p:sp>
-      <p:sp>
-        <p:nvSpPr>
-          <p:cNvPr id="3" name="Content Placeholder 2">
-            <a:extLst>
-              <a:ext uri="{FF2B5EF4-FFF2-40B4-BE49-F238E27FC236}">
-                <a16:creationId xmlns:a16="http://schemas.microsoft.com/office/drawing/2014/main" id="{6DC0AD01-6AF1-568D-5EE9-595670A1F191}"/>
-              </a:ext>
-            </a:extLst>
-          </p:cNvPr>
-          <p:cNvSpPr>
-            <a:spLocks noGrp="1"/>
-          </p:cNvSpPr>
-          <p:nvPr>
-            <p:ph idx="1"/>
-          </p:nvPr>
-        </p:nvSpPr>
-        <p:spPr/>
-        <p:txBody>
-          <a:bodyPr/>
-          <a:lstStyle/>
-          <a:p>
-            <a:endParaRPr lang="en-US"/>
-          </a:p>
-        </p:txBody>
-      </p:sp>
-      <p:pic>
-        <p:nvPicPr>
-          <p:cNvPr id="1026" name="Picture 2" descr="Tensorflow Vs Pytorch - Genspark">
-            <a:extLst>
-              <a:ext uri="{FF2B5EF4-FFF2-40B4-BE49-F238E27FC236}">
-                <a16:creationId xmlns:a16="http://schemas.microsoft.com/office/drawing/2014/main" id="{CD22A901-CC16-1938-35F5-77DEF90BF958}"/>
-              </a:ext>
-            </a:extLst>
-          </p:cNvPr>
-          <p:cNvPicPr>
-            <a:picLocks noChangeAspect="1" noChangeArrowheads="1"/>
-          </p:cNvPicPr>
-          <p:nvPr/>
-        </p:nvPicPr>
-        <p:blipFill>
-          <a:blip r:embed="rId2">
-            <a:extLst>
-              <a:ext uri="{28A0092B-C50C-407E-A947-70E740481C1C}">
-                <a14:useLocalDpi xmlns:a14="http://schemas.microsoft.com/office/drawing/2010/main" val="0"/>
-              </a:ext>
-            </a:extLst>
-          </a:blip>
-          <a:srcRect/>
-          <a:stretch>
-            <a:fillRect/>
-          </a:stretch>
-        </p:blipFill>
-        <p:spPr bwMode="auto">
-          <a:xfrm>
-            <a:off x="0" y="511175"/>
-            <a:ext cx="12192000" cy="5834063"/>
-          </a:xfrm>
-          <a:prstGeom prst="rect">
-            <a:avLst/>
-          </a:prstGeom>
-          <a:noFill/>
-          <a:extLst>
-            <a:ext uri="{909E8E84-426E-40DD-AFC4-6F175D3DCCD1}">
-              <a14:hiddenFill xmlns:a14="http://schemas.microsoft.com/office/drawing/2010/main">
-                <a:solidFill>
-                  <a:srgbClr val="FFFFFF"/>
-                </a:solidFill>
-              </a14:hiddenFill>
-            </a:ext>
-          </a:extLst>
-        </p:spPr>
-      </p:pic>
-    </p:spTree>
-    <p:extLst>
-      <p:ext uri="{BB962C8B-B14F-4D97-AF65-F5344CB8AC3E}">
-        <p14:creationId xmlns:p14="http://schemas.microsoft.com/office/powerpoint/2010/main" val="1565625161"/>
-      </p:ext>
-    </p:extLst>
-  </p:cSld>
-  <p:clrMapOvr>
-    <a:masterClrMapping/>
-  </p:clrMapOvr>
-</p:sld>
-</file>
-
-<file path=ppt/slides/slide19.xml><?xml version="1.0" encoding="utf-8"?>
-<p:sld xmlns:a="http://schemas.openxmlformats.org/drawingml/2006/main" xmlns:r="http://schemas.openxmlformats.org/officeDocument/2006/relationships" xmlns:p="http://schemas.openxmlformats.org/presentationml/2006/main" show="0">
-  <p:cSld>
-    <p:spTree>
-      <p:nvGrpSpPr>
-        <p:cNvPr id="1" name=""/>
-        <p:cNvGrpSpPr/>
-        <p:nvPr/>
-      </p:nvGrpSpPr>
-      <p:grpSpPr>
-        <a:xfrm>
-          <a:off x="0" y="0"/>
-          <a:ext cx="0" cy="0"/>
-          <a:chOff x="0" y="0"/>
-          <a:chExt cx="0" cy="0"/>
-        </a:xfrm>
-      </p:grpSpPr>
-      <p:sp>
-        <p:nvSpPr>
-          <p:cNvPr id="2" name="Title 1">
-            <a:extLst>
-              <a:ext uri="{FF2B5EF4-FFF2-40B4-BE49-F238E27FC236}">
-                <a16:creationId xmlns:a16="http://schemas.microsoft.com/office/drawing/2014/main" id="{B4F9A2DA-8BB9-21D7-E0A9-8B3F711F33B0}"/>
-              </a:ext>
-            </a:extLst>
-          </p:cNvPr>
-          <p:cNvSpPr>
-            <a:spLocks noGrp="1"/>
-          </p:cNvSpPr>
-          <p:nvPr>
-            <p:ph type="title"/>
-          </p:nvPr>
-        </p:nvSpPr>
-        <p:spPr/>
-        <p:txBody>
-          <a:bodyPr/>
-          <a:lstStyle/>
-          <a:p>
-            <a:r>
-              <a:rPr lang="en-US" dirty="0"/>
-              <a:t>Getting’ Torchy With it</a:t>
-            </a:r>
-          </a:p>
-        </p:txBody>
-      </p:sp>
-      <p:sp>
-        <p:nvSpPr>
-          <p:cNvPr id="3" name="Content Placeholder 2">
-            <a:extLst>
-              <a:ext uri="{FF2B5EF4-FFF2-40B4-BE49-F238E27FC236}">
-                <a16:creationId xmlns:a16="http://schemas.microsoft.com/office/drawing/2014/main" id="{C3FFBE25-9441-9F5F-ED90-658161F7456E}"/>
-              </a:ext>
-            </a:extLst>
-          </p:cNvPr>
-          <p:cNvSpPr>
-            <a:spLocks noGrp="1"/>
-          </p:cNvSpPr>
-          <p:nvPr>
-            <p:ph idx="1"/>
-          </p:nvPr>
-        </p:nvSpPr>
-        <p:spPr>
-          <a:xfrm>
-            <a:off x="1451579" y="1853754"/>
-            <a:ext cx="9603275" cy="4199727"/>
-          </a:xfrm>
-        </p:spPr>
-        <p:txBody>
-          <a:bodyPr/>
-          <a:lstStyle/>
-          <a:p>
-            <a:r>
-              <a:rPr lang="en-US" dirty="0"/>
-              <a:t>It is kind of lower-level in code syntax:</a:t>
-            </a:r>
-          </a:p>
-          <a:p>
-            <a:pPr lvl="1"/>
-            <a:r>
-              <a:rPr lang="en-US" dirty="0"/>
-              <a:t>It looks ‘messier’ or more in the details that we might be used to. </a:t>
-            </a:r>
-          </a:p>
-          <a:p>
-            <a:r>
-              <a:rPr lang="en-US" dirty="0"/>
-              <a:t>In code, we need to:</a:t>
-            </a:r>
-          </a:p>
-          <a:p>
-            <a:pPr lvl="1"/>
-            <a:r>
-              <a:rPr lang="en-US" dirty="0"/>
-              <a:t>Prepare data. </a:t>
-            </a:r>
-          </a:p>
-          <a:p>
-            <a:pPr lvl="1"/>
-            <a:r>
-              <a:rPr lang="en-US" dirty="0"/>
-              <a:t>Create model structure. </a:t>
-            </a:r>
-          </a:p>
-          <a:p>
-            <a:pPr lvl="1"/>
-            <a:r>
-              <a:rPr lang="en-US" dirty="0"/>
-              <a:t>Define the training loop. </a:t>
-            </a:r>
-          </a:p>
-          <a:p>
-            <a:r>
-              <a:rPr lang="en-US" dirty="0"/>
-              <a:t>Most of the details (gradient, loss) can be handled by </a:t>
-            </a:r>
-            <a:r>
-              <a:rPr lang="en-US" dirty="0" err="1"/>
-              <a:t>pytorch</a:t>
-            </a:r>
-            <a:r>
-              <a:rPr lang="en-US" dirty="0"/>
-              <a:t>, we must setup ‘framework’. </a:t>
-            </a:r>
-          </a:p>
-          <a:p>
-            <a:pPr lvl="1"/>
-            <a:endParaRPr lang="en-US" dirty="0"/>
-          </a:p>
-        </p:txBody>
-      </p:sp>
-    </p:spTree>
-    <p:extLst>
-      <p:ext uri="{BB962C8B-B14F-4D97-AF65-F5344CB8AC3E}">
-        <p14:creationId xmlns:p14="http://schemas.microsoft.com/office/powerpoint/2010/main" val="999376434"/>
-      </p:ext>
-    </p:extLst>
-  </p:cSld>
-  <p:clrMapOvr>
-    <a:masterClrMapping/>
-  </p:clrMapOvr>
-</p:sld>
-</file>
-
-<file path=ppt/slides/slide2.xml><?xml version="1.0" encoding="utf-8"?>
 <p:sld xmlns:a="http://schemas.openxmlformats.org/drawingml/2006/main" xmlns:r="http://schemas.openxmlformats.org/officeDocument/2006/relationships" xmlns:p="http://schemas.openxmlformats.org/presentationml/2006/main">
   <p:cSld>
     <p:spTree>
@@ -5709,812 +4998,6 @@
           <p:cNvPr id="2" name="Title 1">
             <a:extLst>
               <a:ext uri="{FF2B5EF4-FFF2-40B4-BE49-F238E27FC236}">
-                <a16:creationId xmlns:a16="http://schemas.microsoft.com/office/drawing/2014/main" id="{23B87C2B-24B9-9D56-7AB2-D4B377682C75}"/>
-              </a:ext>
-            </a:extLst>
-          </p:cNvPr>
-          <p:cNvSpPr>
-            <a:spLocks noGrp="1"/>
-          </p:cNvSpPr>
-          <p:nvPr>
-            <p:ph type="title"/>
-          </p:nvPr>
-        </p:nvSpPr>
-        <p:spPr/>
-        <p:txBody>
-          <a:bodyPr/>
-          <a:lstStyle/>
-          <a:p>
-            <a:r>
-              <a:rPr lang="en-US" dirty="0"/>
-              <a:t>Some reading</a:t>
-            </a:r>
-          </a:p>
-        </p:txBody>
-      </p:sp>
-      <p:sp>
-        <p:nvSpPr>
-          <p:cNvPr id="3" name="Content Placeholder 2">
-            <a:extLst>
-              <a:ext uri="{FF2B5EF4-FFF2-40B4-BE49-F238E27FC236}">
-                <a16:creationId xmlns:a16="http://schemas.microsoft.com/office/drawing/2014/main" id="{0385F695-A340-FCB4-175A-0E2C2FB61345}"/>
-              </a:ext>
-            </a:extLst>
-          </p:cNvPr>
-          <p:cNvSpPr>
-            <a:spLocks noGrp="1"/>
-          </p:cNvSpPr>
-          <p:nvPr>
-            <p:ph idx="1"/>
-          </p:nvPr>
-        </p:nvSpPr>
-        <p:spPr>
-          <a:xfrm>
-            <a:off x="1451579" y="1853754"/>
-            <a:ext cx="9603275" cy="4199727"/>
-          </a:xfrm>
-        </p:spPr>
-        <p:txBody>
-          <a:bodyPr/>
-          <a:lstStyle/>
-          <a:p>
-            <a:r>
-              <a:rPr lang="en-US" dirty="0"/>
-              <a:t>Deep learning with </a:t>
-            </a:r>
-            <a:r>
-              <a:rPr lang="en-US" dirty="0" err="1"/>
-              <a:t>Pytorch</a:t>
-            </a:r>
-            <a:r>
-              <a:rPr lang="en-US" dirty="0"/>
-              <a:t>:</a:t>
-            </a:r>
-          </a:p>
-          <a:p>
-            <a:pPr lvl="1"/>
-            <a:r>
-              <a:rPr lang="en-US" dirty="0"/>
-              <a:t>1 – Intro (pretty simple and basic)</a:t>
-            </a:r>
-          </a:p>
-          <a:p>
-            <a:pPr lvl="1"/>
-            <a:r>
-              <a:rPr lang="en-US" dirty="0"/>
-              <a:t>2 – Neural network example/basic intro. </a:t>
-            </a:r>
-          </a:p>
-          <a:p>
-            <a:pPr lvl="1"/>
-            <a:r>
-              <a:rPr lang="en-US" dirty="0"/>
-              <a:t>3/4 - Tensors and datasets. (~next week)</a:t>
-            </a:r>
-          </a:p>
-          <a:p>
-            <a:pPr lvl="1"/>
-            <a:r>
-              <a:rPr lang="en-US" dirty="0"/>
-              <a:t>5 – </a:t>
-            </a:r>
-            <a:r>
-              <a:rPr lang="en-US" dirty="0" err="1"/>
-              <a:t>Pytorch</a:t>
-            </a:r>
-            <a:r>
-              <a:rPr lang="en-US" dirty="0"/>
-              <a:t> model and training details. (~today)</a:t>
-            </a:r>
-          </a:p>
-          <a:p>
-            <a:pPr lvl="1"/>
-            <a:r>
-              <a:rPr lang="en-US" dirty="0"/>
-              <a:t>6 – Extending from 5, more </a:t>
-            </a:r>
-            <a:r>
-              <a:rPr lang="en-US" dirty="0" err="1"/>
-              <a:t>pytorch</a:t>
-            </a:r>
-            <a:r>
-              <a:rPr lang="en-US" dirty="0"/>
-              <a:t> details. (~next week)</a:t>
-            </a:r>
-          </a:p>
-          <a:p>
-            <a:r>
-              <a:rPr lang="en-US" dirty="0"/>
-              <a:t>You want to read all of this stuff over the next ~2 weeks, but it isn’t super urgent. </a:t>
-            </a:r>
-          </a:p>
-          <a:p>
-            <a:r>
-              <a:rPr lang="en-US" dirty="0"/>
-              <a:t>Overall, the book is written to explain ML and NN simultaneously. </a:t>
-            </a:r>
-          </a:p>
-          <a:p>
-            <a:pPr lvl="1"/>
-            <a:r>
-              <a:rPr lang="en-US" dirty="0"/>
-              <a:t>You can gloss over or skip the parts there are old news for us. </a:t>
-            </a:r>
-          </a:p>
-          <a:p>
-            <a:pPr lvl="1"/>
-            <a:r>
-              <a:rPr lang="en-US" dirty="0"/>
-              <a:t>You do want to read it, the depth is good, this is kind of hard to full grasp solely from doing. </a:t>
-            </a:r>
-          </a:p>
-        </p:txBody>
-      </p:sp>
-    </p:spTree>
-    <p:extLst>
-      <p:ext uri="{BB962C8B-B14F-4D97-AF65-F5344CB8AC3E}">
-        <p14:creationId xmlns:p14="http://schemas.microsoft.com/office/powerpoint/2010/main" val="3814373323"/>
-      </p:ext>
-    </p:extLst>
-  </p:cSld>
-  <p:clrMapOvr>
-    <a:masterClrMapping/>
-  </p:clrMapOvr>
-</p:sld>
-</file>
-
-<file path=ppt/slides/slide20.xml><?xml version="1.0" encoding="utf-8"?>
-<p:sld xmlns:a="http://schemas.openxmlformats.org/drawingml/2006/main" xmlns:r="http://schemas.openxmlformats.org/officeDocument/2006/relationships" xmlns:p="http://schemas.openxmlformats.org/presentationml/2006/main" show="0">
-  <p:cSld>
-    <p:bg>
-      <p:bgPr>
-        <a:gradFill rotWithShape="1">
-          <a:gsLst>
-            <a:gs pos="0">
-              <a:schemeClr val="bg2">
-                <a:tint val="94000"/>
-                <a:satMod val="80000"/>
-                <a:lumMod val="106000"/>
-              </a:schemeClr>
-            </a:gs>
-            <a:gs pos="100000">
-              <a:schemeClr val="bg2">
-                <a:shade val="80000"/>
-              </a:schemeClr>
-            </a:gs>
-          </a:gsLst>
-          <a:path path="circle">
-            <a:fillToRect l="43000" r="43000" b="100000"/>
-          </a:path>
-        </a:gradFill>
-        <a:effectLst/>
-      </p:bgPr>
-    </p:bg>
-    <p:spTree>
-      <p:nvGrpSpPr>
-        <p:cNvPr id="1" name=""/>
-        <p:cNvGrpSpPr/>
-        <p:nvPr/>
-      </p:nvGrpSpPr>
-      <p:grpSpPr>
-        <a:xfrm>
-          <a:off x="0" y="0"/>
-          <a:ext cx="0" cy="0"/>
-          <a:chOff x="0" y="0"/>
-          <a:chExt cx="0" cy="0"/>
-        </a:xfrm>
-      </p:grpSpPr>
-      <p:sp>
-        <p:nvSpPr>
-          <p:cNvPr id="2" name="Title 1">
-            <a:extLst>
-              <a:ext uri="{FF2B5EF4-FFF2-40B4-BE49-F238E27FC236}">
-                <a16:creationId xmlns:a16="http://schemas.microsoft.com/office/drawing/2014/main" id="{25071A97-47E9-F444-9636-BB7DB4F00FEB}"/>
-              </a:ext>
-            </a:extLst>
-          </p:cNvPr>
-          <p:cNvSpPr>
-            <a:spLocks noGrp="1"/>
-          </p:cNvSpPr>
-          <p:nvPr>
-            <p:ph type="title"/>
-          </p:nvPr>
-        </p:nvSpPr>
-        <p:spPr>
-          <a:xfrm>
-            <a:off x="1451579" y="804519"/>
-            <a:ext cx="9603275" cy="1049235"/>
-          </a:xfrm>
-        </p:spPr>
-        <p:txBody>
-          <a:bodyPr>
-            <a:normAutofit/>
-          </a:bodyPr>
-          <a:lstStyle/>
-          <a:p>
-            <a:r>
-              <a:rPr lang="en-US" dirty="0"/>
-              <a:t>Using </a:t>
-            </a:r>
-            <a:r>
-              <a:rPr lang="en-US" dirty="0" err="1"/>
-              <a:t>Keras</a:t>
-            </a:r>
-            <a:r>
-              <a:rPr lang="en-US" dirty="0"/>
-              <a:t> and </a:t>
-            </a:r>
-            <a:r>
-              <a:rPr lang="en-US" dirty="0" err="1"/>
-              <a:t>Tensorflow</a:t>
-            </a:r>
-            <a:endParaRPr lang="en-US" dirty="0"/>
-          </a:p>
-        </p:txBody>
-      </p:sp>
-      <p:sp>
-        <p:nvSpPr>
-          <p:cNvPr id="3" name="Content Placeholder 2">
-            <a:extLst>
-              <a:ext uri="{FF2B5EF4-FFF2-40B4-BE49-F238E27FC236}">
-                <a16:creationId xmlns:a16="http://schemas.microsoft.com/office/drawing/2014/main" id="{FDCA9CF5-3203-A047-BA61-A160628EAD90}"/>
-              </a:ext>
-            </a:extLst>
-          </p:cNvPr>
-          <p:cNvSpPr>
-            <a:spLocks noGrp="1"/>
-          </p:cNvSpPr>
-          <p:nvPr>
-            <p:ph idx="1"/>
-          </p:nvPr>
-        </p:nvSpPr>
-        <p:spPr>
-          <a:xfrm>
-            <a:off x="0" y="2015734"/>
-            <a:ext cx="7958137" cy="4037747"/>
-          </a:xfrm>
-        </p:spPr>
-        <p:txBody>
-          <a:bodyPr>
-            <a:normAutofit/>
-          </a:bodyPr>
-          <a:lstStyle/>
-          <a:p>
-            <a:r>
-              <a:rPr lang="en-US" sz="2400" dirty="0"/>
-              <a:t>When creating a NN with TF we don’t need to care about internal calculations. </a:t>
-            </a:r>
-          </a:p>
-          <a:p>
-            <a:r>
-              <a:rPr lang="en-US" sz="2400" dirty="0"/>
-              <a:t>We specify what the model is, what the layers are, and configure them via parameters. </a:t>
-            </a:r>
-          </a:p>
-          <a:p>
-            <a:pPr lvl="1"/>
-            <a:r>
-              <a:rPr lang="en-US" sz="2200" dirty="0"/>
-              <a:t>Dot products and transposes can be ignored. </a:t>
-            </a:r>
-          </a:p>
-          <a:p>
-            <a:r>
-              <a:rPr lang="en-US" sz="2400" dirty="0"/>
-              <a:t>Starting point is creating a model, we’ll always use a Sequential one. </a:t>
-            </a:r>
-          </a:p>
-          <a:p>
-            <a:pPr lvl="1"/>
-            <a:r>
-              <a:rPr lang="en-US" sz="2000" dirty="0"/>
-              <a:t>Other types of models allow for us to customize that internal stuff. </a:t>
-            </a:r>
-          </a:p>
-        </p:txBody>
-      </p:sp>
-      <p:pic>
-        <p:nvPicPr>
-          <p:cNvPr id="1026" name="Picture 2" descr="TensorFlow 1.0 vs 2.0, Part 3: tf.keras | by Yusup | AI³ | Theory,  Practice, Business | Medium">
-            <a:extLst>
-              <a:ext uri="{FF2B5EF4-FFF2-40B4-BE49-F238E27FC236}">
-                <a16:creationId xmlns:a16="http://schemas.microsoft.com/office/drawing/2014/main" id="{350DA86F-F65F-E543-BF8B-F33CEF270BCB}"/>
-              </a:ext>
-            </a:extLst>
-          </p:cNvPr>
-          <p:cNvPicPr>
-            <a:picLocks noChangeAspect="1" noChangeArrowheads="1"/>
-          </p:cNvPicPr>
-          <p:nvPr/>
-        </p:nvPicPr>
-        <p:blipFill rotWithShape="1">
-          <a:blip r:embed="rId2">
-            <a:extLst>
-              <a:ext uri="{28A0092B-C50C-407E-A947-70E740481C1C}">
-                <a14:useLocalDpi xmlns:a14="http://schemas.microsoft.com/office/drawing/2010/main" val="0"/>
-              </a:ext>
-            </a:extLst>
-          </a:blip>
-          <a:srcRect l="18479" t="18191" r="17445" b="19410"/>
-          <a:stretch/>
-        </p:blipFill>
-        <p:spPr bwMode="auto">
-          <a:xfrm>
-            <a:off x="8088015" y="2304978"/>
-            <a:ext cx="4103985" cy="2248044"/>
-          </a:xfrm>
-          <a:prstGeom prst="rect">
-            <a:avLst/>
-          </a:prstGeom>
-          <a:noFill/>
-          <a:extLst>
-            <a:ext uri="{909E8E84-426E-40DD-AFC4-6F175D3DCCD1}">
-              <a14:hiddenFill xmlns:a14="http://schemas.microsoft.com/office/drawing/2010/main">
-                <a:solidFill>
-                  <a:srgbClr val="FFFFFF"/>
-                </a:solidFill>
-              </a14:hiddenFill>
-            </a:ext>
-          </a:extLst>
-        </p:spPr>
-      </p:pic>
-    </p:spTree>
-    <p:extLst>
-      <p:ext uri="{BB962C8B-B14F-4D97-AF65-F5344CB8AC3E}">
-        <p14:creationId xmlns:p14="http://schemas.microsoft.com/office/powerpoint/2010/main" val="2043793861"/>
-      </p:ext>
-    </p:extLst>
-  </p:cSld>
-  <p:clrMapOvr>
-    <a:masterClrMapping/>
-  </p:clrMapOvr>
-</p:sld>
-</file>
-
-<file path=ppt/slides/slide21.xml><?xml version="1.0" encoding="utf-8"?>
-<p:sld xmlns:a="http://schemas.openxmlformats.org/drawingml/2006/main" xmlns:r="http://schemas.openxmlformats.org/officeDocument/2006/relationships" xmlns:p="http://schemas.openxmlformats.org/presentationml/2006/main" show="0">
-  <p:cSld>
-    <p:spTree>
-      <p:nvGrpSpPr>
-        <p:cNvPr id="1" name=""/>
-        <p:cNvGrpSpPr/>
-        <p:nvPr/>
-      </p:nvGrpSpPr>
-      <p:grpSpPr>
-        <a:xfrm>
-          <a:off x="0" y="0"/>
-          <a:ext cx="0" cy="0"/>
-          <a:chOff x="0" y="0"/>
-          <a:chExt cx="0" cy="0"/>
-        </a:xfrm>
-      </p:grpSpPr>
-      <p:sp>
-        <p:nvSpPr>
-          <p:cNvPr id="2" name="Title 1">
-            <a:extLst>
-              <a:ext uri="{FF2B5EF4-FFF2-40B4-BE49-F238E27FC236}">
-                <a16:creationId xmlns:a16="http://schemas.microsoft.com/office/drawing/2014/main" id="{C694AC4B-4B95-D476-F6B6-70FF045C7291}"/>
-              </a:ext>
-            </a:extLst>
-          </p:cNvPr>
-          <p:cNvSpPr>
-            <a:spLocks noGrp="1"/>
-          </p:cNvSpPr>
-          <p:nvPr>
-            <p:ph type="title"/>
-          </p:nvPr>
-        </p:nvSpPr>
-        <p:spPr/>
-        <p:txBody>
-          <a:bodyPr/>
-          <a:lstStyle/>
-          <a:p>
-            <a:r>
-              <a:rPr lang="en-US" dirty="0"/>
-              <a:t>Please Cry for Me!</a:t>
-            </a:r>
-          </a:p>
-        </p:txBody>
-      </p:sp>
-      <p:sp>
-        <p:nvSpPr>
-          <p:cNvPr id="3" name="Content Placeholder 2">
-            <a:extLst>
-              <a:ext uri="{FF2B5EF4-FFF2-40B4-BE49-F238E27FC236}">
-                <a16:creationId xmlns:a16="http://schemas.microsoft.com/office/drawing/2014/main" id="{07BA60B3-2A92-1DDB-5FA4-C01F0CCA2DD4}"/>
-              </a:ext>
-            </a:extLst>
-          </p:cNvPr>
-          <p:cNvSpPr>
-            <a:spLocks noGrp="1"/>
-          </p:cNvSpPr>
-          <p:nvPr>
-            <p:ph idx="1"/>
-          </p:nvPr>
-        </p:nvSpPr>
-        <p:spPr/>
-        <p:txBody>
-          <a:bodyPr/>
-          <a:lstStyle/>
-          <a:p>
-            <a:r>
-              <a:rPr lang="en-US" dirty="0"/>
-              <a:t>They seriously made the naming conventions and documentation with </a:t>
-            </a:r>
-            <a:r>
-              <a:rPr lang="en-US" dirty="0" err="1"/>
-              <a:t>keras</a:t>
-            </a:r>
-            <a:r>
-              <a:rPr lang="en-US" dirty="0"/>
-              <a:t>/</a:t>
-            </a:r>
-            <a:r>
-              <a:rPr lang="en-US" dirty="0" err="1"/>
-              <a:t>tf</a:t>
-            </a:r>
-            <a:r>
-              <a:rPr lang="en-US" dirty="0"/>
-              <a:t> so confusing…</a:t>
-            </a:r>
-          </a:p>
-        </p:txBody>
-      </p:sp>
-      <p:pic>
-        <p:nvPicPr>
-          <p:cNvPr id="2050" name="Picture 2" descr="How to let your child know they can feel sad | Lovevery">
-            <a:extLst>
-              <a:ext uri="{FF2B5EF4-FFF2-40B4-BE49-F238E27FC236}">
-                <a16:creationId xmlns:a16="http://schemas.microsoft.com/office/drawing/2014/main" id="{A888C50F-197F-2873-2612-7E430840F626}"/>
-              </a:ext>
-            </a:extLst>
-          </p:cNvPr>
-          <p:cNvPicPr>
-            <a:picLocks noChangeAspect="1" noChangeArrowheads="1"/>
-          </p:cNvPicPr>
-          <p:nvPr/>
-        </p:nvPicPr>
-        <p:blipFill>
-          <a:blip r:embed="rId2">
-            <a:extLst>
-              <a:ext uri="{28A0092B-C50C-407E-A947-70E740481C1C}">
-                <a14:useLocalDpi xmlns:a14="http://schemas.microsoft.com/office/drawing/2010/main" val="0"/>
-              </a:ext>
-            </a:extLst>
-          </a:blip>
-          <a:srcRect/>
-          <a:stretch>
-            <a:fillRect/>
-          </a:stretch>
-        </p:blipFill>
-        <p:spPr bwMode="auto">
-          <a:xfrm>
-            <a:off x="3144637" y="2962219"/>
-            <a:ext cx="5902726" cy="3504642"/>
-          </a:xfrm>
-          <a:prstGeom prst="rect">
-            <a:avLst/>
-          </a:prstGeom>
-          <a:noFill/>
-          <a:extLst>
-            <a:ext uri="{909E8E84-426E-40DD-AFC4-6F175D3DCCD1}">
-              <a14:hiddenFill xmlns:a14="http://schemas.microsoft.com/office/drawing/2010/main">
-                <a:solidFill>
-                  <a:srgbClr val="FFFFFF"/>
-                </a:solidFill>
-              </a14:hiddenFill>
-            </a:ext>
-          </a:extLst>
-        </p:spPr>
-      </p:pic>
-    </p:spTree>
-    <p:extLst>
-      <p:ext uri="{BB962C8B-B14F-4D97-AF65-F5344CB8AC3E}">
-        <p14:creationId xmlns:p14="http://schemas.microsoft.com/office/powerpoint/2010/main" val="3353719315"/>
-      </p:ext>
-    </p:extLst>
-  </p:cSld>
-  <p:clrMapOvr>
-    <a:masterClrMapping/>
-  </p:clrMapOvr>
-</p:sld>
-</file>
-
-<file path=ppt/slides/slide22.xml><?xml version="1.0" encoding="utf-8"?>
-<p:sld xmlns:a="http://schemas.openxmlformats.org/drawingml/2006/main" xmlns:r="http://schemas.openxmlformats.org/officeDocument/2006/relationships" xmlns:p="http://schemas.openxmlformats.org/presentationml/2006/main" show="0">
-  <p:cSld>
-    <p:spTree>
-      <p:nvGrpSpPr>
-        <p:cNvPr id="1" name=""/>
-        <p:cNvGrpSpPr/>
-        <p:nvPr/>
-      </p:nvGrpSpPr>
-      <p:grpSpPr>
-        <a:xfrm>
-          <a:off x="0" y="0"/>
-          <a:ext cx="0" cy="0"/>
-          <a:chOff x="0" y="0"/>
-          <a:chExt cx="0" cy="0"/>
-        </a:xfrm>
-      </p:grpSpPr>
-      <p:sp>
-        <p:nvSpPr>
-          <p:cNvPr id="2" name="Title 1">
-            <a:extLst>
-              <a:ext uri="{FF2B5EF4-FFF2-40B4-BE49-F238E27FC236}">
-                <a16:creationId xmlns:a16="http://schemas.microsoft.com/office/drawing/2014/main" id="{188D7D37-C93B-985D-69C4-90E165AD08A1}"/>
-              </a:ext>
-            </a:extLst>
-          </p:cNvPr>
-          <p:cNvSpPr>
-            <a:spLocks noGrp="1"/>
-          </p:cNvSpPr>
-          <p:nvPr>
-            <p:ph type="title"/>
-          </p:nvPr>
-        </p:nvSpPr>
-        <p:spPr/>
-        <p:txBody>
-          <a:bodyPr/>
-          <a:lstStyle/>
-          <a:p>
-            <a:r>
-              <a:rPr lang="en-US" dirty="0" err="1"/>
-              <a:t>Keras</a:t>
-            </a:r>
-            <a:r>
-              <a:rPr lang="en-US" dirty="0"/>
-              <a:t> Documentation</a:t>
-            </a:r>
-          </a:p>
-        </p:txBody>
-      </p:sp>
-      <p:sp>
-        <p:nvSpPr>
-          <p:cNvPr id="3" name="Content Placeholder 2">
-            <a:extLst>
-              <a:ext uri="{FF2B5EF4-FFF2-40B4-BE49-F238E27FC236}">
-                <a16:creationId xmlns:a16="http://schemas.microsoft.com/office/drawing/2014/main" id="{C8F19BAD-5A66-8F26-998C-60DC237EA201}"/>
-              </a:ext>
-            </a:extLst>
-          </p:cNvPr>
-          <p:cNvSpPr>
-            <a:spLocks noGrp="1"/>
-          </p:cNvSpPr>
-          <p:nvPr>
-            <p:ph idx="1"/>
-          </p:nvPr>
-        </p:nvSpPr>
-        <p:spPr>
-          <a:xfrm>
-            <a:off x="1451579" y="1942012"/>
-            <a:ext cx="9603275" cy="4111470"/>
-          </a:xfrm>
-        </p:spPr>
-        <p:txBody>
-          <a:bodyPr/>
-          <a:lstStyle/>
-          <a:p>
-            <a:r>
-              <a:rPr lang="en-US" dirty="0"/>
-              <a:t>The </a:t>
-            </a:r>
-            <a:r>
-              <a:rPr lang="en-US" dirty="0" err="1"/>
-              <a:t>keras</a:t>
-            </a:r>
-            <a:r>
-              <a:rPr lang="en-US" dirty="0"/>
-              <a:t> documentation is at </a:t>
-            </a:r>
-            <a:r>
-              <a:rPr lang="en-US" dirty="0">
-                <a:hlinkClick r:id="rId2"/>
-              </a:rPr>
-              <a:t>https://keras.io/api/</a:t>
-            </a:r>
-            <a:endParaRPr lang="en-US" dirty="0"/>
-          </a:p>
-          <a:p>
-            <a:r>
-              <a:rPr lang="en-US" dirty="0"/>
-              <a:t>It is generally pretty good and reasonably clear. </a:t>
-            </a:r>
-          </a:p>
-          <a:p>
-            <a:r>
-              <a:rPr lang="en-US" dirty="0"/>
-              <a:t>There are some pretty good examples for many things. </a:t>
-            </a:r>
-          </a:p>
-          <a:p>
-            <a:r>
-              <a:rPr lang="en-US" dirty="0"/>
-              <a:t>It also has slightly older documentation from TensorFlow. </a:t>
-            </a:r>
-          </a:p>
-          <a:p>
-            <a:pPr lvl="1"/>
-            <a:r>
-              <a:rPr lang="en-US" dirty="0"/>
-              <a:t>This also comes up a lot if googling. </a:t>
-            </a:r>
-          </a:p>
-          <a:p>
-            <a:pPr lvl="1"/>
-            <a:r>
-              <a:rPr lang="en-US" dirty="0"/>
-              <a:t>Lots of this stuff is very good, especially for more basic problems (like ours). </a:t>
-            </a:r>
-          </a:p>
-          <a:p>
-            <a:r>
-              <a:rPr lang="en-US" dirty="0"/>
-              <a:t>In general, the older stuff works the same, with minor changes:</a:t>
-            </a:r>
-          </a:p>
-          <a:p>
-            <a:pPr lvl="1"/>
-            <a:r>
-              <a:rPr lang="en-US" dirty="0"/>
-              <a:t>Import and naming of stuff tends to change, function doesn’t. </a:t>
-            </a:r>
-          </a:p>
-          <a:p>
-            <a:pPr lvl="1"/>
-            <a:r>
-              <a:rPr lang="en-US" dirty="0"/>
-              <a:t>Some things get superseded, but that is less common than name/place changes. </a:t>
-            </a:r>
-          </a:p>
-        </p:txBody>
-      </p:sp>
-    </p:spTree>
-    <p:extLst>
-      <p:ext uri="{BB962C8B-B14F-4D97-AF65-F5344CB8AC3E}">
-        <p14:creationId xmlns:p14="http://schemas.microsoft.com/office/powerpoint/2010/main" val="3694291278"/>
-      </p:ext>
-    </p:extLst>
-  </p:cSld>
-  <p:clrMapOvr>
-    <a:masterClrMapping/>
-  </p:clrMapOvr>
-</p:sld>
-</file>
-
-<file path=ppt/slides/slide23.xml><?xml version="1.0" encoding="utf-8"?>
-<p:sld xmlns:a="http://schemas.openxmlformats.org/drawingml/2006/main" xmlns:r="http://schemas.openxmlformats.org/officeDocument/2006/relationships" xmlns:p="http://schemas.openxmlformats.org/presentationml/2006/main" show="0">
-  <p:cSld>
-    <p:spTree>
-      <p:nvGrpSpPr>
-        <p:cNvPr id="1" name=""/>
-        <p:cNvGrpSpPr/>
-        <p:nvPr/>
-      </p:nvGrpSpPr>
-      <p:grpSpPr>
-        <a:xfrm>
-          <a:off x="0" y="0"/>
-          <a:ext cx="0" cy="0"/>
-          <a:chOff x="0" y="0"/>
-          <a:chExt cx="0" cy="0"/>
-        </a:xfrm>
-      </p:grpSpPr>
-      <p:sp>
-        <p:nvSpPr>
-          <p:cNvPr id="2" name="Title 1">
-            <a:extLst>
-              <a:ext uri="{FF2B5EF4-FFF2-40B4-BE49-F238E27FC236}">
-                <a16:creationId xmlns:a16="http://schemas.microsoft.com/office/drawing/2014/main" id="{742ED225-BFC0-C930-F0F8-EB3057200A31}"/>
-              </a:ext>
-            </a:extLst>
-          </p:cNvPr>
-          <p:cNvSpPr>
-            <a:spLocks noGrp="1"/>
-          </p:cNvSpPr>
-          <p:nvPr>
-            <p:ph type="title"/>
-          </p:nvPr>
-        </p:nvSpPr>
-        <p:spPr/>
-        <p:txBody>
-          <a:bodyPr/>
-          <a:lstStyle/>
-          <a:p>
-            <a:r>
-              <a:rPr lang="en-US" dirty="0" err="1"/>
-              <a:t>Pytorch</a:t>
-            </a:r>
-            <a:r>
-              <a:rPr lang="en-US" dirty="0"/>
-              <a:t> Documentation</a:t>
-            </a:r>
-          </a:p>
-        </p:txBody>
-      </p:sp>
-      <p:sp>
-        <p:nvSpPr>
-          <p:cNvPr id="3" name="Content Placeholder 2">
-            <a:extLst>
-              <a:ext uri="{FF2B5EF4-FFF2-40B4-BE49-F238E27FC236}">
-                <a16:creationId xmlns:a16="http://schemas.microsoft.com/office/drawing/2014/main" id="{C92FC749-C7B3-E59F-97E0-4B90CDD327DE}"/>
-              </a:ext>
-            </a:extLst>
-          </p:cNvPr>
-          <p:cNvSpPr>
-            <a:spLocks noGrp="1"/>
-          </p:cNvSpPr>
-          <p:nvPr>
-            <p:ph idx="1"/>
-          </p:nvPr>
-        </p:nvSpPr>
-        <p:spPr/>
-        <p:txBody>
-          <a:bodyPr/>
-          <a:lstStyle/>
-          <a:p>
-            <a:r>
-              <a:rPr lang="en-US" dirty="0" err="1"/>
-              <a:t>Pytorch</a:t>
-            </a:r>
-            <a:r>
-              <a:rPr lang="en-US" dirty="0"/>
-              <a:t> is very widely used and is documented in many ways all over the internet. </a:t>
-            </a:r>
-          </a:p>
-          <a:p>
-            <a:r>
-              <a:rPr lang="en-US" dirty="0"/>
-              <a:t>The </a:t>
-            </a:r>
-            <a:r>
-              <a:rPr lang="en-US" dirty="0" err="1"/>
-              <a:t>pytorch</a:t>
-            </a:r>
-            <a:r>
-              <a:rPr lang="en-US" dirty="0"/>
-              <a:t> documentation is pretty good, has some tutorials and examples. </a:t>
-            </a:r>
-          </a:p>
-          <a:p>
-            <a:endParaRPr lang="en-US" dirty="0"/>
-          </a:p>
-        </p:txBody>
-      </p:sp>
-    </p:spTree>
-    <p:extLst>
-      <p:ext uri="{BB962C8B-B14F-4D97-AF65-F5344CB8AC3E}">
-        <p14:creationId xmlns:p14="http://schemas.microsoft.com/office/powerpoint/2010/main" val="2251183412"/>
-      </p:ext>
-    </p:extLst>
-  </p:cSld>
-  <p:clrMapOvr>
-    <a:masterClrMapping/>
-  </p:clrMapOvr>
-</p:sld>
-</file>
-
-<file path=ppt/slides/slide24.xml><?xml version="1.0" encoding="utf-8"?>
-<p:sld xmlns:a="http://schemas.openxmlformats.org/drawingml/2006/main" xmlns:r="http://schemas.openxmlformats.org/officeDocument/2006/relationships" xmlns:p="http://schemas.openxmlformats.org/presentationml/2006/main">
-  <p:cSld>
-    <p:spTree>
-      <p:nvGrpSpPr>
-        <p:cNvPr id="1" name=""/>
-        <p:cNvGrpSpPr/>
-        <p:nvPr/>
-      </p:nvGrpSpPr>
-      <p:grpSpPr>
-        <a:xfrm>
-          <a:off x="0" y="0"/>
-          <a:ext cx="0" cy="0"/>
-          <a:chOff x="0" y="0"/>
-          <a:chExt cx="0" cy="0"/>
-        </a:xfrm>
-      </p:grpSpPr>
-      <p:sp>
-        <p:nvSpPr>
-          <p:cNvPr id="2" name="Title 1">
-            <a:extLst>
-              <a:ext uri="{FF2B5EF4-FFF2-40B4-BE49-F238E27FC236}">
                 <a16:creationId xmlns:a16="http://schemas.microsoft.com/office/drawing/2014/main" id="{45A5BE8B-8BC7-2FAE-6FF9-B95BDCF4A542}"/>
               </a:ext>
             </a:extLst>
@@ -6665,7 +5148,7 @@
 </p:sld>
 </file>
 
-<file path=ppt/slides/slide25.xml><?xml version="1.0" encoding="utf-8"?>
+<file path=ppt/slides/slide17.xml><?xml version="1.0" encoding="utf-8"?>
 <p:sld xmlns:a="http://schemas.openxmlformats.org/drawingml/2006/main" xmlns:r="http://schemas.openxmlformats.org/officeDocument/2006/relationships" xmlns:p="http://schemas.openxmlformats.org/presentationml/2006/main">
   <p:cSld>
     <p:spTree>
@@ -6859,7 +5342,7 @@
 </p:sld>
 </file>
 
-<file path=ppt/slides/slide26.xml><?xml version="1.0" encoding="utf-8"?>
+<file path=ppt/slides/slide18.xml><?xml version="1.0" encoding="utf-8"?>
 <p:sld xmlns:a="http://schemas.openxmlformats.org/drawingml/2006/main" xmlns:r="http://schemas.openxmlformats.org/officeDocument/2006/relationships" xmlns:p="http://schemas.openxmlformats.org/presentationml/2006/main">
   <p:cSld>
     <p:spTree>
@@ -7034,7 +5517,7 @@
 </p:sld>
 </file>
 
-<file path=ppt/slides/slide27.xml><?xml version="1.0" encoding="utf-8"?>
+<file path=ppt/slides/slide19.xml><?xml version="1.0" encoding="utf-8"?>
 <p:sld xmlns:a="http://schemas.openxmlformats.org/drawingml/2006/main" xmlns:r="http://schemas.openxmlformats.org/officeDocument/2006/relationships" xmlns:p="http://schemas.openxmlformats.org/presentationml/2006/main" show="0">
   <p:cSld>
     <p:spTree>
@@ -7200,7 +5683,183 @@
 </p:sld>
 </file>
 
-<file path=ppt/slides/slide28.xml><?xml version="1.0" encoding="utf-8"?>
+<file path=ppt/slides/slide2.xml><?xml version="1.0" encoding="utf-8"?>
+<p:sld xmlns:a="http://schemas.openxmlformats.org/drawingml/2006/main" xmlns:r="http://schemas.openxmlformats.org/officeDocument/2006/relationships" xmlns:p="http://schemas.openxmlformats.org/presentationml/2006/main">
+  <p:cSld>
+    <p:spTree>
+      <p:nvGrpSpPr>
+        <p:cNvPr id="1" name=""/>
+        <p:cNvGrpSpPr/>
+        <p:nvPr/>
+      </p:nvGrpSpPr>
+      <p:grpSpPr>
+        <a:xfrm>
+          <a:off x="0" y="0"/>
+          <a:ext cx="0" cy="0"/>
+          <a:chOff x="0" y="0"/>
+          <a:chExt cx="0" cy="0"/>
+        </a:xfrm>
+      </p:grpSpPr>
+      <p:sp>
+        <p:nvSpPr>
+          <p:cNvPr id="2" name="Title 1">
+            <a:extLst>
+              <a:ext uri="{FF2B5EF4-FFF2-40B4-BE49-F238E27FC236}">
+                <a16:creationId xmlns:a16="http://schemas.microsoft.com/office/drawing/2014/main" id="{23B87C2B-24B9-9D56-7AB2-D4B377682C75}"/>
+              </a:ext>
+            </a:extLst>
+          </p:cNvPr>
+          <p:cNvSpPr>
+            <a:spLocks noGrp="1"/>
+          </p:cNvSpPr>
+          <p:nvPr>
+            <p:ph type="title"/>
+          </p:nvPr>
+        </p:nvSpPr>
+        <p:spPr/>
+        <p:txBody>
+          <a:bodyPr/>
+          <a:lstStyle/>
+          <a:p>
+            <a:r>
+              <a:rPr lang="en-US" dirty="0"/>
+              <a:t>Some reading</a:t>
+            </a:r>
+          </a:p>
+        </p:txBody>
+      </p:sp>
+      <p:sp>
+        <p:nvSpPr>
+          <p:cNvPr id="3" name="Content Placeholder 2">
+            <a:extLst>
+              <a:ext uri="{FF2B5EF4-FFF2-40B4-BE49-F238E27FC236}">
+                <a16:creationId xmlns:a16="http://schemas.microsoft.com/office/drawing/2014/main" id="{0385F695-A340-FCB4-175A-0E2C2FB61345}"/>
+              </a:ext>
+            </a:extLst>
+          </p:cNvPr>
+          <p:cNvSpPr>
+            <a:spLocks noGrp="1"/>
+          </p:cNvSpPr>
+          <p:nvPr>
+            <p:ph idx="1"/>
+          </p:nvPr>
+        </p:nvSpPr>
+        <p:spPr>
+          <a:xfrm>
+            <a:off x="1451579" y="1853754"/>
+            <a:ext cx="9603275" cy="4199727"/>
+          </a:xfrm>
+        </p:spPr>
+        <p:txBody>
+          <a:bodyPr/>
+          <a:lstStyle/>
+          <a:p>
+            <a:r>
+              <a:rPr lang="en-US" dirty="0"/>
+              <a:t>Deep learning with </a:t>
+            </a:r>
+            <a:r>
+              <a:rPr lang="en-US" dirty="0" err="1"/>
+              <a:t>Pytorch</a:t>
+            </a:r>
+            <a:r>
+              <a:rPr lang="en-US" dirty="0"/>
+              <a:t>:</a:t>
+            </a:r>
+          </a:p>
+          <a:p>
+            <a:pPr lvl="1"/>
+            <a:r>
+              <a:rPr lang="en-US" dirty="0"/>
+              <a:t>1 – Intro (pretty simple and basic)</a:t>
+            </a:r>
+          </a:p>
+          <a:p>
+            <a:pPr lvl="1"/>
+            <a:r>
+              <a:rPr lang="en-US" dirty="0"/>
+              <a:t>2 – Neural network example/basic intro. </a:t>
+            </a:r>
+          </a:p>
+          <a:p>
+            <a:pPr lvl="1"/>
+            <a:r>
+              <a:rPr lang="en-US" dirty="0"/>
+              <a:t>3/4 - Tensors and datasets. (~next week)</a:t>
+            </a:r>
+          </a:p>
+          <a:p>
+            <a:pPr lvl="1"/>
+            <a:r>
+              <a:rPr lang="en-US" dirty="0"/>
+              <a:t>5 – </a:t>
+            </a:r>
+            <a:r>
+              <a:rPr lang="en-US" dirty="0" err="1"/>
+              <a:t>Pytorch</a:t>
+            </a:r>
+            <a:r>
+              <a:rPr lang="en-US" dirty="0"/>
+              <a:t> model and training details. (~today)</a:t>
+            </a:r>
+          </a:p>
+          <a:p>
+            <a:pPr lvl="1"/>
+            <a:r>
+              <a:rPr lang="en-US" dirty="0"/>
+              <a:t>6 – Extending from 5, more </a:t>
+            </a:r>
+            <a:r>
+              <a:rPr lang="en-US" dirty="0" err="1"/>
+              <a:t>pytorch</a:t>
+            </a:r>
+            <a:r>
+              <a:rPr lang="en-US" dirty="0"/>
+              <a:t> details. (~next week)</a:t>
+            </a:r>
+          </a:p>
+          <a:p>
+            <a:r>
+              <a:rPr lang="en-US" dirty="0"/>
+              <a:t>You want to read all of this stuff over the next ~2 weeks, but it isn’t super urgent. </a:t>
+            </a:r>
+          </a:p>
+          <a:p>
+            <a:r>
+              <a:rPr lang="en-US" dirty="0"/>
+              <a:t>Overall, the book is written to explain ML and NN simultaneously. </a:t>
+            </a:r>
+          </a:p>
+          <a:p>
+            <a:pPr lvl="1"/>
+            <a:r>
+              <a:rPr lang="en-US" dirty="0"/>
+              <a:t>You can gloss over or skip the parts there are old news for us. </a:t>
+            </a:r>
+          </a:p>
+          <a:p>
+            <a:pPr lvl="1"/>
+            <a:r>
+              <a:rPr lang="en-US" dirty="0"/>
+              <a:t>You do want to read it, the depth is good, this is kind of hard to full grasp solely from doing. </a:t>
+            </a:r>
+          </a:p>
+        </p:txBody>
+      </p:sp>
+    </p:spTree>
+    <p:extLst>
+      <p:ext uri="{BB962C8B-B14F-4D97-AF65-F5344CB8AC3E}">
+        <p14:creationId xmlns:p14="http://schemas.microsoft.com/office/powerpoint/2010/main" val="3814373323"/>
+      </p:ext>
+    </p:extLst>
+  </p:cSld>
+  <p:clrMapOvr>
+    <a:masterClrMapping/>
+  </p:clrMapOvr>
+</p:sld>
+</file>
+
+<file path=ppt/slides/slide20.xml><?xml version="1.0" encoding="utf-8"?>
 <p:sld xmlns:a="http://schemas.openxmlformats.org/drawingml/2006/main" xmlns:r="http://schemas.openxmlformats.org/officeDocument/2006/relationships" xmlns:p="http://schemas.openxmlformats.org/presentationml/2006/main">
   <p:cSld>
     <p:spTree>
@@ -7362,7 +6021,7 @@
 </p:sld>
 </file>
 
-<file path=ppt/slides/slide29.xml><?xml version="1.0" encoding="utf-8"?>
+<file path=ppt/slides/slide21.xml><?xml version="1.0" encoding="utf-8"?>
 <p:sld xmlns:a="http://schemas.openxmlformats.org/drawingml/2006/main" xmlns:r="http://schemas.openxmlformats.org/officeDocument/2006/relationships" xmlns:p="http://schemas.openxmlformats.org/presentationml/2006/main">
   <p:cSld>
     <p:spTree>
@@ -7567,7 +6226,7 @@
 </p:sld>
 </file>
 
-<file path=ppt/slides/slide3.xml><?xml version="1.0" encoding="utf-8"?>
+<file path=ppt/slides/slide22.xml><?xml version="1.0" encoding="utf-8"?>
 <p:sld xmlns:a="http://schemas.openxmlformats.org/drawingml/2006/main" xmlns:r="http://schemas.openxmlformats.org/officeDocument/2006/relationships" xmlns:p="http://schemas.openxmlformats.org/presentationml/2006/main">
   <p:cSld>
     <p:spTree>
@@ -7589,7 +6248,7 @@
           <p:cNvPr id="2" name="Title 1">
             <a:extLst>
               <a:ext uri="{FF2B5EF4-FFF2-40B4-BE49-F238E27FC236}">
-                <a16:creationId xmlns:a16="http://schemas.microsoft.com/office/drawing/2014/main" id="{3358651E-E0E9-A14E-A8FC-AAB671BE4A0E}"/>
+                <a16:creationId xmlns:a16="http://schemas.microsoft.com/office/drawing/2014/main" id="{5AE67326-EEDB-B4F6-BEC5-9B68CA0B7C8D}"/>
               </a:ext>
             </a:extLst>
           </p:cNvPr>
@@ -7597,57 +6256,111 @@
             <a:spLocks noGrp="1"/>
           </p:cNvSpPr>
           <p:nvPr>
-            <p:ph type="ctrTitle"/>
+            <p:ph type="title"/>
           </p:nvPr>
         </p:nvSpPr>
         <p:spPr/>
         <p:txBody>
-          <a:bodyPr>
-            <a:normAutofit/>
-          </a:bodyPr>
-          <a:lstStyle/>
-          <a:p>
-            <a:r>
-              <a:rPr lang="en-US" dirty="0"/>
-              <a:t>Neural Networks with </a:t>
-            </a:r>
+          <a:bodyPr/>
+          <a:lstStyle/>
+          <a:p>
+            <a:r>
+              <a:rPr lang="en-US" dirty="0"/>
+              <a:t>Using Data</a:t>
+            </a:r>
+          </a:p>
+        </p:txBody>
+      </p:sp>
+      <p:sp>
+        <p:nvSpPr>
+          <p:cNvPr id="3" name="Content Placeholder 2">
+            <a:extLst>
+              <a:ext uri="{FF2B5EF4-FFF2-40B4-BE49-F238E27FC236}">
+                <a16:creationId xmlns:a16="http://schemas.microsoft.com/office/drawing/2014/main" id="{FF42676D-2F05-7351-ADEA-F67D38FEEC37}"/>
+              </a:ext>
+            </a:extLst>
+          </p:cNvPr>
+          <p:cNvSpPr>
+            <a:spLocks noGrp="1"/>
+          </p:cNvSpPr>
+          <p:nvPr>
+            <p:ph idx="1"/>
+          </p:nvPr>
+        </p:nvSpPr>
+        <p:spPr>
+          <a:xfrm>
+            <a:off x="1451579" y="1950719"/>
+            <a:ext cx="9603275" cy="4102761"/>
+          </a:xfrm>
+        </p:spPr>
+        <p:txBody>
+          <a:bodyPr/>
+          <a:lstStyle/>
+          <a:p>
+            <a:r>
+              <a:rPr lang="en-US" dirty="0"/>
+              <a:t>We’ll do more data details next week. </a:t>
+            </a:r>
+          </a:p>
+          <a:p>
+            <a:r>
+              <a:rPr lang="en-US" dirty="0"/>
+              <a:t>Data works with two types of objects:</a:t>
+            </a:r>
+          </a:p>
+          <a:p>
+            <a:pPr lvl="1"/>
             <a:r>
               <a:rPr lang="en-US" dirty="0" err="1"/>
               <a:t>PyTorch</a:t>
             </a:r>
-            <a:endParaRPr lang="en-US" dirty="0"/>
-          </a:p>
-        </p:txBody>
-      </p:sp>
-      <p:sp>
-        <p:nvSpPr>
-          <p:cNvPr id="3" name="Subtitle 2">
-            <a:extLst>
-              <a:ext uri="{FF2B5EF4-FFF2-40B4-BE49-F238E27FC236}">
-                <a16:creationId xmlns:a16="http://schemas.microsoft.com/office/drawing/2014/main" id="{85D02B9C-D175-3343-B5C5-C97A981D508F}"/>
-              </a:ext>
-            </a:extLst>
-          </p:cNvPr>
-          <p:cNvSpPr>
-            <a:spLocks noGrp="1"/>
-          </p:cNvSpPr>
-          <p:nvPr>
-            <p:ph type="subTitle" idx="1"/>
-          </p:nvPr>
-        </p:nvSpPr>
-        <p:spPr/>
-        <p:txBody>
-          <a:bodyPr/>
-          <a:lstStyle/>
-          <a:p>
-            <a:endParaRPr lang="en-US"/>
+            <a:r>
+              <a:rPr lang="en-US" dirty="0"/>
+              <a:t> Datasets – responsible for accessing data and providing an item on demand. </a:t>
+            </a:r>
+          </a:p>
+          <a:p>
+            <a:pPr lvl="1"/>
+            <a:r>
+              <a:rPr lang="en-US" dirty="0" err="1"/>
+              <a:t>DataLoaders</a:t>
+            </a:r>
+            <a:r>
+              <a:rPr lang="en-US" dirty="0"/>
+              <a:t> – uses a dataset to provide model-ready data in batches. </a:t>
+            </a:r>
+          </a:p>
+          <a:p>
+            <a:r>
+              <a:rPr lang="en-US" dirty="0"/>
+              <a:t>Like most other things, these can be premade or custom. </a:t>
+            </a:r>
+          </a:p>
+          <a:p>
+            <a:r>
+              <a:rPr lang="en-US" dirty="0"/>
+              <a:t>NN data is often/usually big – we can’t load it in memory. </a:t>
+            </a:r>
+          </a:p>
+          <a:p>
+            <a:pPr lvl="1"/>
+            <a:r>
+              <a:rPr lang="en-US" dirty="0"/>
+              <a:t>The Dataset needs to get one ‘chunk’ of data at a time and load it from disk. </a:t>
+            </a:r>
+          </a:p>
+          <a:p>
+            <a:r>
+              <a:rPr lang="en-US" dirty="0"/>
+              <a:t>There’s not a pipeline (though we could use it if we made one), prep steps are often provided in a transformation argument in the dataset. (more next week). </a:t>
+            </a:r>
           </a:p>
         </p:txBody>
       </p:sp>
     </p:spTree>
     <p:extLst>
       <p:ext uri="{BB962C8B-B14F-4D97-AF65-F5344CB8AC3E}">
-        <p14:creationId xmlns:p14="http://schemas.microsoft.com/office/powerpoint/2010/main" val="1659382160"/>
+        <p14:creationId xmlns:p14="http://schemas.microsoft.com/office/powerpoint/2010/main" val="2209341874"/>
       </p:ext>
     </p:extLst>
   </p:cSld>
@@ -7657,7 +6370,7 @@
 </p:sld>
 </file>
 
-<file path=ppt/slides/slide30.xml><?xml version="1.0" encoding="utf-8"?>
+<file path=ppt/slides/slide23.xml><?xml version="1.0" encoding="utf-8"?>
 <p:sld xmlns:a="http://schemas.openxmlformats.org/drawingml/2006/main" xmlns:r="http://schemas.openxmlformats.org/officeDocument/2006/relationships" xmlns:p="http://schemas.openxmlformats.org/presentationml/2006/main">
   <p:cSld>
     <p:spTree>
@@ -7679,144 +6392,6 @@
           <p:cNvPr id="2" name="Title 1">
             <a:extLst>
               <a:ext uri="{FF2B5EF4-FFF2-40B4-BE49-F238E27FC236}">
-                <a16:creationId xmlns:a16="http://schemas.microsoft.com/office/drawing/2014/main" id="{5AE67326-EEDB-B4F6-BEC5-9B68CA0B7C8D}"/>
-              </a:ext>
-            </a:extLst>
-          </p:cNvPr>
-          <p:cNvSpPr>
-            <a:spLocks noGrp="1"/>
-          </p:cNvSpPr>
-          <p:nvPr>
-            <p:ph type="title"/>
-          </p:nvPr>
-        </p:nvSpPr>
-        <p:spPr/>
-        <p:txBody>
-          <a:bodyPr/>
-          <a:lstStyle/>
-          <a:p>
-            <a:r>
-              <a:rPr lang="en-US" dirty="0"/>
-              <a:t>Using Data</a:t>
-            </a:r>
-          </a:p>
-        </p:txBody>
-      </p:sp>
-      <p:sp>
-        <p:nvSpPr>
-          <p:cNvPr id="3" name="Content Placeholder 2">
-            <a:extLst>
-              <a:ext uri="{FF2B5EF4-FFF2-40B4-BE49-F238E27FC236}">
-                <a16:creationId xmlns:a16="http://schemas.microsoft.com/office/drawing/2014/main" id="{FF42676D-2F05-7351-ADEA-F67D38FEEC37}"/>
-              </a:ext>
-            </a:extLst>
-          </p:cNvPr>
-          <p:cNvSpPr>
-            <a:spLocks noGrp="1"/>
-          </p:cNvSpPr>
-          <p:nvPr>
-            <p:ph idx="1"/>
-          </p:nvPr>
-        </p:nvSpPr>
-        <p:spPr>
-          <a:xfrm>
-            <a:off x="1451579" y="1950720"/>
-            <a:ext cx="9603275" cy="3791712"/>
-          </a:xfrm>
-        </p:spPr>
-        <p:txBody>
-          <a:bodyPr/>
-          <a:lstStyle/>
-          <a:p>
-            <a:r>
-              <a:rPr lang="en-US" dirty="0"/>
-              <a:t>We’ll do more data details next week. </a:t>
-            </a:r>
-          </a:p>
-          <a:p>
-            <a:r>
-              <a:rPr lang="en-US" dirty="0"/>
-              <a:t>Data works with two types of objects:</a:t>
-            </a:r>
-          </a:p>
-          <a:p>
-            <a:pPr lvl="1"/>
-            <a:r>
-              <a:rPr lang="en-US" dirty="0" err="1"/>
-              <a:t>PyTorch</a:t>
-            </a:r>
-            <a:r>
-              <a:rPr lang="en-US" dirty="0"/>
-              <a:t> Datasets – responsible for accessing data and providing an item on demand. </a:t>
-            </a:r>
-          </a:p>
-          <a:p>
-            <a:pPr lvl="1"/>
-            <a:r>
-              <a:rPr lang="en-US" dirty="0" err="1"/>
-              <a:t>DataLoaders</a:t>
-            </a:r>
-            <a:r>
-              <a:rPr lang="en-US" dirty="0"/>
-              <a:t> – uses a dataset to provide model-ready data in batches. </a:t>
-            </a:r>
-          </a:p>
-          <a:p>
-            <a:r>
-              <a:rPr lang="en-US" dirty="0"/>
-              <a:t>Like most other things, these can be premade or custom. </a:t>
-            </a:r>
-          </a:p>
-          <a:p>
-            <a:r>
-              <a:rPr lang="en-US" dirty="0"/>
-              <a:t>NN data is often/usually big – we can’t load it in memory. </a:t>
-            </a:r>
-          </a:p>
-          <a:p>
-            <a:pPr lvl="1"/>
-            <a:r>
-              <a:rPr lang="en-US" dirty="0"/>
-              <a:t>The Dataset needs to get one ‘chunk’ of data at a time and load it from disk. </a:t>
-            </a:r>
-          </a:p>
-        </p:txBody>
-      </p:sp>
-    </p:spTree>
-    <p:extLst>
-      <p:ext uri="{BB962C8B-B14F-4D97-AF65-F5344CB8AC3E}">
-        <p14:creationId xmlns:p14="http://schemas.microsoft.com/office/powerpoint/2010/main" val="2209341874"/>
-      </p:ext>
-    </p:extLst>
-  </p:cSld>
-  <p:clrMapOvr>
-    <a:masterClrMapping/>
-  </p:clrMapOvr>
-</p:sld>
-</file>
-
-<file path=ppt/slides/slide31.xml><?xml version="1.0" encoding="utf-8"?>
-<p:sld xmlns:a="http://schemas.openxmlformats.org/drawingml/2006/main" xmlns:r="http://schemas.openxmlformats.org/officeDocument/2006/relationships" xmlns:p="http://schemas.openxmlformats.org/presentationml/2006/main">
-  <p:cSld>
-    <p:spTree>
-      <p:nvGrpSpPr>
-        <p:cNvPr id="1" name=""/>
-        <p:cNvGrpSpPr/>
-        <p:nvPr/>
-      </p:nvGrpSpPr>
-      <p:grpSpPr>
-        <a:xfrm>
-          <a:off x="0" y="0"/>
-          <a:ext cx="0" cy="0"/>
-          <a:chOff x="0" y="0"/>
-          <a:chExt cx="0" cy="0"/>
-        </a:xfrm>
-      </p:grpSpPr>
-      <p:sp>
-        <p:nvSpPr>
-          <p:cNvPr id="2" name="Title 1">
-            <a:extLst>
-              <a:ext uri="{FF2B5EF4-FFF2-40B4-BE49-F238E27FC236}">
                 <a16:creationId xmlns:a16="http://schemas.microsoft.com/office/drawing/2014/main" id="{A0CF4404-DD77-9CA8-2C95-6E939EFBC7A8}"/>
               </a:ext>
             </a:extLst>
@@ -7875,7 +6450,7 @@
 </p:sld>
 </file>
 
-<file path=ppt/slides/slide32.xml><?xml version="1.0" encoding="utf-8"?>
+<file path=ppt/slides/slide24.xml><?xml version="1.0" encoding="utf-8"?>
 <p:sld xmlns:a="http://schemas.openxmlformats.org/drawingml/2006/main" xmlns:r="http://schemas.openxmlformats.org/officeDocument/2006/relationships" xmlns:p="http://schemas.openxmlformats.org/presentationml/2006/main">
   <p:cSld>
     <p:spTree>
@@ -8011,7 +6586,7 @@
 </p:sld>
 </file>
 
-<file path=ppt/slides/slide33.xml><?xml version="1.0" encoding="utf-8"?>
+<file path=ppt/slides/slide25.xml><?xml version="1.0" encoding="utf-8"?>
 <p:sld xmlns:a="http://schemas.openxmlformats.org/drawingml/2006/main" xmlns:r="http://schemas.openxmlformats.org/officeDocument/2006/relationships" xmlns:p="http://schemas.openxmlformats.org/presentationml/2006/main">
   <p:cSld>
     <p:spTree>
@@ -8152,7 +6727,7 @@
 </p:sld>
 </file>
 
-<file path=ppt/slides/slide34.xml><?xml version="1.0" encoding="utf-8"?>
+<file path=ppt/slides/slide26.xml><?xml version="1.0" encoding="utf-8"?>
 <p:sld xmlns:a="http://schemas.openxmlformats.org/drawingml/2006/main" xmlns:r="http://schemas.openxmlformats.org/officeDocument/2006/relationships" xmlns:p="http://schemas.openxmlformats.org/presentationml/2006/main">
   <p:cSld>
     <p:spTree>
@@ -8336,7 +6911,7 @@
 </p:sld>
 </file>
 
-<file path=ppt/slides/slide35.xml><?xml version="1.0" encoding="utf-8"?>
+<file path=ppt/slides/slide27.xml><?xml version="1.0" encoding="utf-8"?>
 <p:sld xmlns:a="http://schemas.openxmlformats.org/drawingml/2006/main" xmlns:r="http://schemas.openxmlformats.org/officeDocument/2006/relationships" xmlns:p="http://schemas.openxmlformats.org/presentationml/2006/main">
   <p:cSld>
     <p:spTree>
@@ -8485,7 +7060,7 @@
 </p:sld>
 </file>
 
-<file path=ppt/slides/slide36.xml><?xml version="1.0" encoding="utf-8"?>
+<file path=ppt/slides/slide28.xml><?xml version="1.0" encoding="utf-8"?>
 <p:sld xmlns:a="http://schemas.openxmlformats.org/drawingml/2006/main" xmlns:r="http://schemas.openxmlformats.org/officeDocument/2006/relationships" xmlns:p="http://schemas.openxmlformats.org/presentationml/2006/main">
   <p:cSld>
     <p:spTree>
@@ -8623,7 +7198,7 @@
 </p:sld>
 </file>
 
-<file path=ppt/slides/slide37.xml><?xml version="1.0" encoding="utf-8"?>
+<file path=ppt/slides/slide29.xml><?xml version="1.0" encoding="utf-8"?>
 <p:sld xmlns:a="http://schemas.openxmlformats.org/drawingml/2006/main" xmlns:r="http://schemas.openxmlformats.org/officeDocument/2006/relationships" xmlns:p="http://schemas.openxmlformats.org/presentationml/2006/main">
   <p:cSld>
     <p:spTree>
@@ -8818,7 +7393,97 @@
 </p:sld>
 </file>
 
-<file path=ppt/slides/slide38.xml><?xml version="1.0" encoding="utf-8"?>
+<file path=ppt/slides/slide3.xml><?xml version="1.0" encoding="utf-8"?>
+<p:sld xmlns:a="http://schemas.openxmlformats.org/drawingml/2006/main" xmlns:r="http://schemas.openxmlformats.org/officeDocument/2006/relationships" xmlns:p="http://schemas.openxmlformats.org/presentationml/2006/main">
+  <p:cSld>
+    <p:spTree>
+      <p:nvGrpSpPr>
+        <p:cNvPr id="1" name=""/>
+        <p:cNvGrpSpPr/>
+        <p:nvPr/>
+      </p:nvGrpSpPr>
+      <p:grpSpPr>
+        <a:xfrm>
+          <a:off x="0" y="0"/>
+          <a:ext cx="0" cy="0"/>
+          <a:chOff x="0" y="0"/>
+          <a:chExt cx="0" cy="0"/>
+        </a:xfrm>
+      </p:grpSpPr>
+      <p:sp>
+        <p:nvSpPr>
+          <p:cNvPr id="2" name="Title 1">
+            <a:extLst>
+              <a:ext uri="{FF2B5EF4-FFF2-40B4-BE49-F238E27FC236}">
+                <a16:creationId xmlns:a16="http://schemas.microsoft.com/office/drawing/2014/main" id="{3358651E-E0E9-A14E-A8FC-AAB671BE4A0E}"/>
+              </a:ext>
+            </a:extLst>
+          </p:cNvPr>
+          <p:cNvSpPr>
+            <a:spLocks noGrp="1"/>
+          </p:cNvSpPr>
+          <p:nvPr>
+            <p:ph type="ctrTitle"/>
+          </p:nvPr>
+        </p:nvSpPr>
+        <p:spPr/>
+        <p:txBody>
+          <a:bodyPr>
+            <a:normAutofit/>
+          </a:bodyPr>
+          <a:lstStyle/>
+          <a:p>
+            <a:r>
+              <a:rPr lang="en-US" dirty="0"/>
+              <a:t>Neural Networks with </a:t>
+            </a:r>
+            <a:r>
+              <a:rPr lang="en-US" dirty="0" err="1"/>
+              <a:t>PyTorch</a:t>
+            </a:r>
+            <a:endParaRPr lang="en-US" dirty="0"/>
+          </a:p>
+        </p:txBody>
+      </p:sp>
+      <p:sp>
+        <p:nvSpPr>
+          <p:cNvPr id="3" name="Subtitle 2">
+            <a:extLst>
+              <a:ext uri="{FF2B5EF4-FFF2-40B4-BE49-F238E27FC236}">
+                <a16:creationId xmlns:a16="http://schemas.microsoft.com/office/drawing/2014/main" id="{85D02B9C-D175-3343-B5C5-C97A981D508F}"/>
+              </a:ext>
+            </a:extLst>
+          </p:cNvPr>
+          <p:cNvSpPr>
+            <a:spLocks noGrp="1"/>
+          </p:cNvSpPr>
+          <p:nvPr>
+            <p:ph type="subTitle" idx="1"/>
+          </p:nvPr>
+        </p:nvSpPr>
+        <p:spPr/>
+        <p:txBody>
+          <a:bodyPr/>
+          <a:lstStyle/>
+          <a:p>
+            <a:endParaRPr lang="en-US"/>
+          </a:p>
+        </p:txBody>
+      </p:sp>
+    </p:spTree>
+    <p:extLst>
+      <p:ext uri="{BB962C8B-B14F-4D97-AF65-F5344CB8AC3E}">
+        <p14:creationId xmlns:p14="http://schemas.microsoft.com/office/powerpoint/2010/main" val="1659382160"/>
+      </p:ext>
+    </p:extLst>
+  </p:cSld>
+  <p:clrMapOvr>
+    <a:masterClrMapping/>
+  </p:clrMapOvr>
+</p:sld>
+</file>
+
+<file path=ppt/slides/slide30.xml><?xml version="1.0" encoding="utf-8"?>
 <p:sld xmlns:a="http://schemas.openxmlformats.org/drawingml/2006/main" xmlns:r="http://schemas.openxmlformats.org/officeDocument/2006/relationships" xmlns:p="http://schemas.openxmlformats.org/presentationml/2006/main">
   <p:cSld>
     <p:spTree>
@@ -8946,7 +7611,7 @@
 </p:sld>
 </file>
 
-<file path=ppt/slides/slide39.xml><?xml version="1.0" encoding="utf-8"?>
+<file path=ppt/slides/slide31.xml><?xml version="1.0" encoding="utf-8"?>
 <p:sld xmlns:a="http://schemas.openxmlformats.org/drawingml/2006/main" xmlns:r="http://schemas.openxmlformats.org/officeDocument/2006/relationships" xmlns:p="http://schemas.openxmlformats.org/presentationml/2006/main">
   <p:cSld>
     <p:spTree>
@@ -9107,198 +7772,7 @@
 </p:sld>
 </file>
 
-<file path=ppt/slides/slide4.xml><?xml version="1.0" encoding="utf-8"?>
-<p:sld xmlns:a="http://schemas.openxmlformats.org/drawingml/2006/main" xmlns:r="http://schemas.openxmlformats.org/officeDocument/2006/relationships" xmlns:p="http://schemas.openxmlformats.org/presentationml/2006/main">
-  <p:cSld>
-    <p:spTree>
-      <p:nvGrpSpPr>
-        <p:cNvPr id="1" name=""/>
-        <p:cNvGrpSpPr/>
-        <p:nvPr/>
-      </p:nvGrpSpPr>
-      <p:grpSpPr>
-        <a:xfrm>
-          <a:off x="0" y="0"/>
-          <a:ext cx="0" cy="0"/>
-          <a:chOff x="0" y="0"/>
-          <a:chExt cx="0" cy="0"/>
-        </a:xfrm>
-      </p:grpSpPr>
-      <p:sp>
-        <p:nvSpPr>
-          <p:cNvPr id="2" name="Title 1">
-            <a:extLst>
-              <a:ext uri="{FF2B5EF4-FFF2-40B4-BE49-F238E27FC236}">
-                <a16:creationId xmlns:a16="http://schemas.microsoft.com/office/drawing/2014/main" id="{80FB8A79-F199-B728-7F1F-62CD0A9B77D6}"/>
-              </a:ext>
-            </a:extLst>
-          </p:cNvPr>
-          <p:cNvSpPr>
-            <a:spLocks noGrp="1"/>
-          </p:cNvSpPr>
-          <p:nvPr>
-            <p:ph type="title"/>
-          </p:nvPr>
-        </p:nvSpPr>
-        <p:spPr/>
-        <p:txBody>
-          <a:bodyPr/>
-          <a:lstStyle/>
-          <a:p>
-            <a:r>
-              <a:rPr lang="en-US" dirty="0"/>
-              <a:t>Where to run things</a:t>
-            </a:r>
-          </a:p>
-        </p:txBody>
-      </p:sp>
-      <p:sp>
-        <p:nvSpPr>
-          <p:cNvPr id="3" name="Content Placeholder 2">
-            <a:extLst>
-              <a:ext uri="{FF2B5EF4-FFF2-40B4-BE49-F238E27FC236}">
-                <a16:creationId xmlns:a16="http://schemas.microsoft.com/office/drawing/2014/main" id="{7FF730B8-71E5-BD33-44C6-8CE754D5ED41}"/>
-              </a:ext>
-            </a:extLst>
-          </p:cNvPr>
-          <p:cNvSpPr>
-            <a:spLocks noGrp="1"/>
-          </p:cNvSpPr>
-          <p:nvPr>
-            <p:ph idx="1"/>
-          </p:nvPr>
-        </p:nvSpPr>
-        <p:spPr>
-          <a:xfrm>
-            <a:off x="5849605" y="1853754"/>
-            <a:ext cx="6342395" cy="4199727"/>
-          </a:xfrm>
-        </p:spPr>
-        <p:txBody>
-          <a:bodyPr>
-            <a:normAutofit fontScale="92500"/>
-          </a:bodyPr>
-          <a:lstStyle/>
-          <a:p>
-            <a:r>
-              <a:rPr lang="en-US" dirty="0"/>
-              <a:t>We can control where things are processed directly – GPU or CPU. </a:t>
-            </a:r>
-          </a:p>
-          <a:p>
-            <a:r>
-              <a:rPr lang="en-US" dirty="0"/>
-              <a:t>If you have a GPU, you want to set this up locally. </a:t>
-            </a:r>
-          </a:p>
-          <a:p>
-            <a:pPr lvl="1"/>
-            <a:r>
-              <a:rPr lang="en-US" dirty="0"/>
-              <a:t>There a pip command for a GPU accelerated </a:t>
-            </a:r>
-            <a:r>
-              <a:rPr lang="en-US" dirty="0" err="1"/>
-              <a:t>pytorch</a:t>
-            </a:r>
-            <a:r>
-              <a:rPr lang="en-US" dirty="0"/>
-              <a:t> install. </a:t>
-            </a:r>
-          </a:p>
-          <a:p>
-            <a:pPr lvl="1"/>
-            <a:r>
-              <a:rPr lang="en-US" dirty="0"/>
-              <a:t>Mine is an Apple M2, this shows that it’ll use the GPU. </a:t>
-            </a:r>
-          </a:p>
-          <a:p>
-            <a:pPr lvl="1"/>
-            <a:r>
-              <a:rPr lang="en-US" dirty="0"/>
-              <a:t>It can be much, much faster. </a:t>
-            </a:r>
-          </a:p>
-          <a:p>
-            <a:r>
-              <a:rPr lang="en-US" dirty="0"/>
-              <a:t>We can manually send things to GPU as desired. </a:t>
-            </a:r>
-          </a:p>
-          <a:p>
-            <a:pPr lvl="1"/>
-            <a:r>
-              <a:rPr lang="en-US" dirty="0"/>
-              <a:t>Generally, the batch that we are using. </a:t>
-            </a:r>
-          </a:p>
-          <a:p>
-            <a:r>
-              <a:rPr lang="en-US" dirty="0"/>
-              <a:t>Note: code run on remote systems don’t have disk access. </a:t>
-            </a:r>
-          </a:p>
-          <a:p>
-            <a:r>
-              <a:rPr lang="en-US" dirty="0"/>
-              <a:t>We semi regularly need to move things to/from </a:t>
-            </a:r>
-            <a:r>
-              <a:rPr lang="en-US" dirty="0" err="1"/>
-              <a:t>gpu</a:t>
-            </a:r>
-            <a:r>
-              <a:rPr lang="en-US" dirty="0"/>
-              <a:t>. </a:t>
-            </a:r>
-          </a:p>
-        </p:txBody>
-      </p:sp>
-      <p:pic>
-        <p:nvPicPr>
-          <p:cNvPr id="5" name="Picture 4">
-            <a:extLst>
-              <a:ext uri="{FF2B5EF4-FFF2-40B4-BE49-F238E27FC236}">
-                <a16:creationId xmlns:a16="http://schemas.microsoft.com/office/drawing/2014/main" id="{72B4F865-534F-5822-216E-44F8A2133241}"/>
-              </a:ext>
-            </a:extLst>
-          </p:cNvPr>
-          <p:cNvPicPr>
-            <a:picLocks noChangeAspect="1"/>
-          </p:cNvPicPr>
-          <p:nvPr/>
-        </p:nvPicPr>
-        <p:blipFill>
-          <a:blip r:embed="rId2"/>
-          <a:stretch>
-            <a:fillRect/>
-          </a:stretch>
-        </p:blipFill>
-        <p:spPr>
-          <a:xfrm>
-            <a:off x="0" y="2267551"/>
-            <a:ext cx="5849605" cy="3194465"/>
-          </a:xfrm>
-          <a:prstGeom prst="rect">
-            <a:avLst/>
-          </a:prstGeom>
-        </p:spPr>
-      </p:pic>
-    </p:spTree>
-    <p:extLst>
-      <p:ext uri="{BB962C8B-B14F-4D97-AF65-F5344CB8AC3E}">
-        <p14:creationId xmlns:p14="http://schemas.microsoft.com/office/powerpoint/2010/main" val="1545747133"/>
-      </p:ext>
-    </p:extLst>
-  </p:cSld>
-  <p:clrMapOvr>
-    <a:masterClrMapping/>
-  </p:clrMapOvr>
-</p:sld>
-</file>
-
-<file path=ppt/slides/slide40.xml><?xml version="1.0" encoding="utf-8"?>
+<file path=ppt/slides/slide32.xml><?xml version="1.0" encoding="utf-8"?>
 <p:sld xmlns:a="http://schemas.openxmlformats.org/drawingml/2006/main" xmlns:r="http://schemas.openxmlformats.org/officeDocument/2006/relationships" xmlns:p="http://schemas.openxmlformats.org/presentationml/2006/main" show="0">
   <p:cSld>
     <p:spTree>
@@ -9378,7 +7852,7 @@
 </p:sld>
 </file>
 
-<file path=ppt/slides/slide41.xml><?xml version="1.0" encoding="utf-8"?>
+<file path=ppt/slides/slide33.xml><?xml version="1.0" encoding="utf-8"?>
 <p:sld xmlns:a="http://schemas.openxmlformats.org/drawingml/2006/main" xmlns:r="http://schemas.openxmlformats.org/officeDocument/2006/relationships" xmlns:p="http://schemas.openxmlformats.org/presentationml/2006/main">
   <p:cSld>
     <p:spTree>
@@ -9647,7 +8121,7 @@
 </p:sld>
 </file>
 
-<file path=ppt/slides/slide42.xml><?xml version="1.0" encoding="utf-8"?>
+<file path=ppt/slides/slide34.xml><?xml version="1.0" encoding="utf-8"?>
 <p:sld xmlns:a="http://schemas.openxmlformats.org/drawingml/2006/main" xmlns:r="http://schemas.openxmlformats.org/officeDocument/2006/relationships" xmlns:p="http://schemas.openxmlformats.org/presentationml/2006/main">
   <p:cSld>
     <p:spTree>
@@ -9815,7 +8289,7 @@
 </p:sld>
 </file>
 
-<file path=ppt/slides/slide43.xml><?xml version="1.0" encoding="utf-8"?>
+<file path=ppt/slides/slide35.xml><?xml version="1.0" encoding="utf-8"?>
 <p:sld xmlns:a="http://schemas.openxmlformats.org/drawingml/2006/main" xmlns:r="http://schemas.openxmlformats.org/officeDocument/2006/relationships" xmlns:p="http://schemas.openxmlformats.org/presentationml/2006/main">
   <p:cSld>
     <p:spTree>
@@ -10008,7 +8482,7 @@
 </p:sld>
 </file>
 
-<file path=ppt/slides/slide44.xml><?xml version="1.0" encoding="utf-8"?>
+<file path=ppt/slides/slide36.xml><?xml version="1.0" encoding="utf-8"?>
 <p:sld xmlns:a="http://schemas.openxmlformats.org/drawingml/2006/main" xmlns:r="http://schemas.openxmlformats.org/officeDocument/2006/relationships" xmlns:p="http://schemas.openxmlformats.org/presentationml/2006/main">
   <p:cSld>
     <p:spTree>
@@ -10135,7 +8609,7 @@
 </p:sld>
 </file>
 
-<file path=ppt/slides/slide45.xml><?xml version="1.0" encoding="utf-8"?>
+<file path=ppt/slides/slide37.xml><?xml version="1.0" encoding="utf-8"?>
 <p:sld xmlns:a="http://schemas.openxmlformats.org/drawingml/2006/main" xmlns:r="http://schemas.openxmlformats.org/officeDocument/2006/relationships" xmlns:p="http://schemas.openxmlformats.org/presentationml/2006/main">
   <p:cSld>
     <p:spTree>
@@ -10288,7 +8762,7 @@
 </p:sld>
 </file>
 
-<file path=ppt/slides/slide46.xml><?xml version="1.0" encoding="utf-8"?>
+<file path=ppt/slides/slide38.xml><?xml version="1.0" encoding="utf-8"?>
 <p:sld xmlns:a="http://schemas.openxmlformats.org/drawingml/2006/main" xmlns:r="http://schemas.openxmlformats.org/officeDocument/2006/relationships" xmlns:p="http://schemas.openxmlformats.org/presentationml/2006/main">
   <p:cSld>
     <p:spTree>
@@ -10475,7 +8949,7 @@
 </p:sld>
 </file>
 
-<file path=ppt/slides/slide47.xml><?xml version="1.0" encoding="utf-8"?>
+<file path=ppt/slides/slide39.xml><?xml version="1.0" encoding="utf-8"?>
 <p:sld xmlns:a="http://schemas.openxmlformats.org/drawingml/2006/main" xmlns:r="http://schemas.openxmlformats.org/officeDocument/2006/relationships" xmlns:p="http://schemas.openxmlformats.org/presentationml/2006/main">
   <p:cSld>
     <p:spTree>
@@ -10618,7 +9092,198 @@
 </p:sld>
 </file>
 
-<file path=ppt/slides/slide48.xml><?xml version="1.0" encoding="utf-8"?>
+<file path=ppt/slides/slide4.xml><?xml version="1.0" encoding="utf-8"?>
+<p:sld xmlns:a="http://schemas.openxmlformats.org/drawingml/2006/main" xmlns:r="http://schemas.openxmlformats.org/officeDocument/2006/relationships" xmlns:p="http://schemas.openxmlformats.org/presentationml/2006/main">
+  <p:cSld>
+    <p:spTree>
+      <p:nvGrpSpPr>
+        <p:cNvPr id="1" name=""/>
+        <p:cNvGrpSpPr/>
+        <p:nvPr/>
+      </p:nvGrpSpPr>
+      <p:grpSpPr>
+        <a:xfrm>
+          <a:off x="0" y="0"/>
+          <a:ext cx="0" cy="0"/>
+          <a:chOff x="0" y="0"/>
+          <a:chExt cx="0" cy="0"/>
+        </a:xfrm>
+      </p:grpSpPr>
+      <p:sp>
+        <p:nvSpPr>
+          <p:cNvPr id="2" name="Title 1">
+            <a:extLst>
+              <a:ext uri="{FF2B5EF4-FFF2-40B4-BE49-F238E27FC236}">
+                <a16:creationId xmlns:a16="http://schemas.microsoft.com/office/drawing/2014/main" id="{80FB8A79-F199-B728-7F1F-62CD0A9B77D6}"/>
+              </a:ext>
+            </a:extLst>
+          </p:cNvPr>
+          <p:cNvSpPr>
+            <a:spLocks noGrp="1"/>
+          </p:cNvSpPr>
+          <p:nvPr>
+            <p:ph type="title"/>
+          </p:nvPr>
+        </p:nvSpPr>
+        <p:spPr/>
+        <p:txBody>
+          <a:bodyPr/>
+          <a:lstStyle/>
+          <a:p>
+            <a:r>
+              <a:rPr lang="en-US" dirty="0"/>
+              <a:t>Where to run things</a:t>
+            </a:r>
+          </a:p>
+        </p:txBody>
+      </p:sp>
+      <p:sp>
+        <p:nvSpPr>
+          <p:cNvPr id="3" name="Content Placeholder 2">
+            <a:extLst>
+              <a:ext uri="{FF2B5EF4-FFF2-40B4-BE49-F238E27FC236}">
+                <a16:creationId xmlns:a16="http://schemas.microsoft.com/office/drawing/2014/main" id="{7FF730B8-71E5-BD33-44C6-8CE754D5ED41}"/>
+              </a:ext>
+            </a:extLst>
+          </p:cNvPr>
+          <p:cNvSpPr>
+            <a:spLocks noGrp="1"/>
+          </p:cNvSpPr>
+          <p:nvPr>
+            <p:ph idx="1"/>
+          </p:nvPr>
+        </p:nvSpPr>
+        <p:spPr>
+          <a:xfrm>
+            <a:off x="5849605" y="1853754"/>
+            <a:ext cx="6342395" cy="4199727"/>
+          </a:xfrm>
+        </p:spPr>
+        <p:txBody>
+          <a:bodyPr>
+            <a:normAutofit fontScale="92500"/>
+          </a:bodyPr>
+          <a:lstStyle/>
+          <a:p>
+            <a:r>
+              <a:rPr lang="en-US" dirty="0"/>
+              <a:t>We can control where things are processed directly – GPU or CPU. </a:t>
+            </a:r>
+          </a:p>
+          <a:p>
+            <a:r>
+              <a:rPr lang="en-US" dirty="0"/>
+              <a:t>If you have a GPU, you want to set this up locally. </a:t>
+            </a:r>
+          </a:p>
+          <a:p>
+            <a:pPr lvl="1"/>
+            <a:r>
+              <a:rPr lang="en-US" dirty="0"/>
+              <a:t>There a pip command for a GPU accelerated </a:t>
+            </a:r>
+            <a:r>
+              <a:rPr lang="en-US" dirty="0" err="1"/>
+              <a:t>pytorch</a:t>
+            </a:r>
+            <a:r>
+              <a:rPr lang="en-US" dirty="0"/>
+              <a:t> install. </a:t>
+            </a:r>
+          </a:p>
+          <a:p>
+            <a:pPr lvl="1"/>
+            <a:r>
+              <a:rPr lang="en-US" dirty="0"/>
+              <a:t>Mine is an Apple M2, this shows that it’ll use the GPU. </a:t>
+            </a:r>
+          </a:p>
+          <a:p>
+            <a:pPr lvl="1"/>
+            <a:r>
+              <a:rPr lang="en-US" dirty="0"/>
+              <a:t>It can be much, much faster. </a:t>
+            </a:r>
+          </a:p>
+          <a:p>
+            <a:r>
+              <a:rPr lang="en-US" dirty="0"/>
+              <a:t>We can manually send things to GPU as desired. </a:t>
+            </a:r>
+          </a:p>
+          <a:p>
+            <a:pPr lvl="1"/>
+            <a:r>
+              <a:rPr lang="en-US" dirty="0"/>
+              <a:t>Generally, the batch that we are using. </a:t>
+            </a:r>
+          </a:p>
+          <a:p>
+            <a:r>
+              <a:rPr lang="en-US" dirty="0"/>
+              <a:t>Note: code run on remote systems don’t have disk access. </a:t>
+            </a:r>
+          </a:p>
+          <a:p>
+            <a:r>
+              <a:rPr lang="en-US" dirty="0"/>
+              <a:t>We semi regularly need to move things to/from </a:t>
+            </a:r>
+            <a:r>
+              <a:rPr lang="en-US" dirty="0" err="1"/>
+              <a:t>gpu</a:t>
+            </a:r>
+            <a:r>
+              <a:rPr lang="en-US" dirty="0"/>
+              <a:t>. </a:t>
+            </a:r>
+          </a:p>
+        </p:txBody>
+      </p:sp>
+      <p:pic>
+        <p:nvPicPr>
+          <p:cNvPr id="5" name="Picture 4">
+            <a:extLst>
+              <a:ext uri="{FF2B5EF4-FFF2-40B4-BE49-F238E27FC236}">
+                <a16:creationId xmlns:a16="http://schemas.microsoft.com/office/drawing/2014/main" id="{72B4F865-534F-5822-216E-44F8A2133241}"/>
+              </a:ext>
+            </a:extLst>
+          </p:cNvPr>
+          <p:cNvPicPr>
+            <a:picLocks noChangeAspect="1"/>
+          </p:cNvPicPr>
+          <p:nvPr/>
+        </p:nvPicPr>
+        <p:blipFill>
+          <a:blip r:embed="rId2"/>
+          <a:stretch>
+            <a:fillRect/>
+          </a:stretch>
+        </p:blipFill>
+        <p:spPr>
+          <a:xfrm>
+            <a:off x="0" y="2267551"/>
+            <a:ext cx="5849605" cy="3194465"/>
+          </a:xfrm>
+          <a:prstGeom prst="rect">
+            <a:avLst/>
+          </a:prstGeom>
+        </p:spPr>
+      </p:pic>
+    </p:spTree>
+    <p:extLst>
+      <p:ext uri="{BB962C8B-B14F-4D97-AF65-F5344CB8AC3E}">
+        <p14:creationId xmlns:p14="http://schemas.microsoft.com/office/powerpoint/2010/main" val="1545747133"/>
+      </p:ext>
+    </p:extLst>
+  </p:cSld>
+  <p:clrMapOvr>
+    <a:masterClrMapping/>
+  </p:clrMapOvr>
+</p:sld>
+</file>
+
+<file path=ppt/slides/slide40.xml><?xml version="1.0" encoding="utf-8"?>
 <p:sld xmlns:a="http://schemas.openxmlformats.org/drawingml/2006/main" xmlns:r="http://schemas.openxmlformats.org/officeDocument/2006/relationships" xmlns:p="http://schemas.openxmlformats.org/presentationml/2006/main">
   <p:cSld>
     <p:spTree>
@@ -10802,7 +9467,7 @@
 </p:sld>
 </file>
 
-<file path=ppt/slides/slide49.xml><?xml version="1.0" encoding="utf-8"?>
+<file path=ppt/slides/slide41.xml><?xml version="1.0" encoding="utf-8"?>
 <p:sld xmlns:a="http://schemas.openxmlformats.org/drawingml/2006/main" xmlns:r="http://schemas.openxmlformats.org/officeDocument/2006/relationships" xmlns:p="http://schemas.openxmlformats.org/presentationml/2006/main">
   <p:cSld>
     <p:spTree>
@@ -10978,7 +9643,7 @@
 </p:sld>
 </file>
 
-<file path=ppt/slides/slide5.xml><?xml version="1.0" encoding="utf-8"?>
+<file path=ppt/slides/slide42.xml><?xml version="1.0" encoding="utf-8"?>
 <p:sld xmlns:a="http://schemas.openxmlformats.org/drawingml/2006/main" xmlns:r="http://schemas.openxmlformats.org/officeDocument/2006/relationships" xmlns:p="http://schemas.openxmlformats.org/presentationml/2006/main">
   <p:cSld>
     <p:spTree>
@@ -11000,175 +9665,6 @@
           <p:cNvPr id="2" name="Title 1">
             <a:extLst>
               <a:ext uri="{FF2B5EF4-FFF2-40B4-BE49-F238E27FC236}">
-                <a16:creationId xmlns:a16="http://schemas.microsoft.com/office/drawing/2014/main" id="{81142A91-5257-B54B-64F1-6008D8827FCE}"/>
-              </a:ext>
-            </a:extLst>
-          </p:cNvPr>
-          <p:cNvSpPr>
-            <a:spLocks noGrp="1"/>
-          </p:cNvSpPr>
-          <p:nvPr>
-            <p:ph type="title"/>
-          </p:nvPr>
-        </p:nvSpPr>
-        <p:spPr/>
-        <p:txBody>
-          <a:bodyPr/>
-          <a:lstStyle/>
-          <a:p>
-            <a:r>
-              <a:rPr lang="en-US" dirty="0"/>
-              <a:t>Neural Network Libraries</a:t>
-            </a:r>
-          </a:p>
-        </p:txBody>
-      </p:sp>
-      <p:sp>
-        <p:nvSpPr>
-          <p:cNvPr id="3" name="Content Placeholder 2">
-            <a:extLst>
-              <a:ext uri="{FF2B5EF4-FFF2-40B4-BE49-F238E27FC236}">
-                <a16:creationId xmlns:a16="http://schemas.microsoft.com/office/drawing/2014/main" id="{EACEF73A-3D57-53DC-016E-A3B0C595C583}"/>
-              </a:ext>
-            </a:extLst>
-          </p:cNvPr>
-          <p:cNvSpPr>
-            <a:spLocks noGrp="1"/>
-          </p:cNvSpPr>
-          <p:nvPr>
-            <p:ph idx="1"/>
-          </p:nvPr>
-        </p:nvSpPr>
-        <p:spPr>
-          <a:xfrm>
-            <a:off x="1451579" y="1853754"/>
-            <a:ext cx="9603275" cy="4199727"/>
-          </a:xfrm>
-        </p:spPr>
-        <p:txBody>
-          <a:bodyPr/>
-          <a:lstStyle/>
-          <a:p>
-            <a:r>
-              <a:rPr lang="en-US" dirty="0"/>
-              <a:t>Neural networks have libraries similar to sklearn, but there are some new concerns. </a:t>
-            </a:r>
-          </a:p>
-          <a:p>
-            <a:pPr lvl="1"/>
-            <a:r>
-              <a:rPr lang="en-US" dirty="0"/>
-              <a:t>GPU acceleration – the big matrix math that is needed in neural networks is done much (much, much…) faster by GPUs (video cards) than by CPUs (regular processors). </a:t>
-            </a:r>
-          </a:p>
-          <a:p>
-            <a:r>
-              <a:rPr lang="en-US" dirty="0"/>
-              <a:t>To do any serious neural network training, we need a GPU of some sort. </a:t>
-            </a:r>
-          </a:p>
-          <a:p>
-            <a:pPr lvl="1"/>
-            <a:r>
-              <a:rPr lang="en-US" dirty="0" err="1"/>
-              <a:t>nVidia</a:t>
-            </a:r>
-            <a:r>
-              <a:rPr lang="en-US" dirty="0"/>
-              <a:t> GPUs are the king, and far beyond anything else, largely due to CUDA (next). </a:t>
-            </a:r>
-          </a:p>
-          <a:p>
-            <a:pPr lvl="1"/>
-            <a:r>
-              <a:rPr lang="en-US" dirty="0"/>
-              <a:t>Apple silicon macs have </a:t>
-            </a:r>
-            <a:r>
-              <a:rPr lang="en-US" dirty="0" err="1"/>
-              <a:t>tensorflow</a:t>
-            </a:r>
-            <a:r>
-              <a:rPr lang="en-US" dirty="0"/>
-              <a:t> acceleration that you can enable. </a:t>
-            </a:r>
-          </a:p>
-          <a:p>
-            <a:pPr lvl="1"/>
-            <a:r>
-              <a:rPr lang="en-US" dirty="0" err="1"/>
-              <a:t>Colab</a:t>
-            </a:r>
-            <a:r>
-              <a:rPr lang="en-US" dirty="0"/>
-              <a:t> (or other online workbooks) offer GPU access, </a:t>
-            </a:r>
-            <a:r>
-              <a:rPr lang="en-US" dirty="0" err="1"/>
-              <a:t>Colab</a:t>
-            </a:r>
-            <a:r>
-              <a:rPr lang="en-US" dirty="0"/>
-              <a:t> is the easiest/cheapest solution.</a:t>
-            </a:r>
-          </a:p>
-          <a:p>
-            <a:pPr lvl="1"/>
-            <a:r>
-              <a:rPr lang="en-US" dirty="0"/>
-              <a:t>Other GPUs like Radeons or Intel usually have something, but it tends to suck. </a:t>
-            </a:r>
-          </a:p>
-          <a:p>
-            <a:r>
-              <a:rPr lang="en-US" dirty="0"/>
-              <a:t>You typically install some variation of TensorFlow and get GPU friendly output. </a:t>
-            </a:r>
-          </a:p>
-          <a:p>
-            <a:pPr lvl="1"/>
-            <a:r>
-              <a:rPr lang="en-US" dirty="0"/>
-              <a:t>The GPU operations utilize some faster set of commands than ‘normal’ operations. (CUDA)</a:t>
-            </a:r>
-          </a:p>
-        </p:txBody>
-      </p:sp>
-    </p:spTree>
-    <p:extLst>
-      <p:ext uri="{BB962C8B-B14F-4D97-AF65-F5344CB8AC3E}">
-        <p14:creationId xmlns:p14="http://schemas.microsoft.com/office/powerpoint/2010/main" val="600591514"/>
-      </p:ext>
-    </p:extLst>
-  </p:cSld>
-  <p:clrMapOvr>
-    <a:masterClrMapping/>
-  </p:clrMapOvr>
-</p:sld>
-</file>
-
-<file path=ppt/slides/slide50.xml><?xml version="1.0" encoding="utf-8"?>
-<p:sld xmlns:a="http://schemas.openxmlformats.org/drawingml/2006/main" xmlns:r="http://schemas.openxmlformats.org/officeDocument/2006/relationships" xmlns:p="http://schemas.openxmlformats.org/presentationml/2006/main">
-  <p:cSld>
-    <p:spTree>
-      <p:nvGrpSpPr>
-        <p:cNvPr id="1" name=""/>
-        <p:cNvGrpSpPr/>
-        <p:nvPr/>
-      </p:nvGrpSpPr>
-      <p:grpSpPr>
-        <a:xfrm>
-          <a:off x="0" y="0"/>
-          <a:ext cx="0" cy="0"/>
-          <a:chOff x="0" y="0"/>
-          <a:chExt cx="0" cy="0"/>
-        </a:xfrm>
-      </p:grpSpPr>
-      <p:sp>
-        <p:nvSpPr>
-          <p:cNvPr id="2" name="Title 1">
-            <a:extLst>
-              <a:ext uri="{FF2B5EF4-FFF2-40B4-BE49-F238E27FC236}">
                 <a16:creationId xmlns:a16="http://schemas.microsoft.com/office/drawing/2014/main" id="{14C7C980-41D5-E8B3-01CF-B4E356D40B55}"/>
               </a:ext>
             </a:extLst>
@@ -11308,7 +9804,7 @@
 </p:sld>
 </file>
 
-<file path=ppt/slides/slide51.xml><?xml version="1.0" encoding="utf-8"?>
+<file path=ppt/slides/slide43.xml><?xml version="1.0" encoding="utf-8"?>
 <p:sld xmlns:a="http://schemas.openxmlformats.org/drawingml/2006/main" xmlns:r="http://schemas.openxmlformats.org/officeDocument/2006/relationships" xmlns:p="http://schemas.openxmlformats.org/presentationml/2006/main">
   <p:cSld>
     <p:spTree>
@@ -11453,7 +9949,7 @@
 </p:sld>
 </file>
 
-<file path=ppt/slides/slide52.xml><?xml version="1.0" encoding="utf-8"?>
+<file path=ppt/slides/slide44.xml><?xml version="1.0" encoding="utf-8"?>
 <p:sld xmlns:a="http://schemas.openxmlformats.org/drawingml/2006/main" xmlns:r="http://schemas.openxmlformats.org/officeDocument/2006/relationships" xmlns:p="http://schemas.openxmlformats.org/presentationml/2006/main" show="0">
   <p:cSld>
     <p:spTree>
@@ -11890,7 +10386,7 @@
 </p:sld>
 </file>
 
-<file path=ppt/slides/slide53.xml><?xml version="1.0" encoding="utf-8"?>
+<file path=ppt/slides/slide45.xml><?xml version="1.0" encoding="utf-8"?>
 <p:sld xmlns:a="http://schemas.openxmlformats.org/drawingml/2006/main" xmlns:r="http://schemas.openxmlformats.org/officeDocument/2006/relationships" xmlns:p="http://schemas.openxmlformats.org/presentationml/2006/main">
   <p:cSld>
     <p:spTree>
@@ -12076,7 +10572,7 @@
 </p:sld>
 </file>
 
-<file path=ppt/slides/slide54.xml><?xml version="1.0" encoding="utf-8"?>
+<file path=ppt/slides/slide46.xml><?xml version="1.0" encoding="utf-8"?>
 <p:sld xmlns:a="http://schemas.openxmlformats.org/drawingml/2006/main" xmlns:r="http://schemas.openxmlformats.org/officeDocument/2006/relationships" xmlns:p="http://schemas.openxmlformats.org/presentationml/2006/main">
   <p:cSld>
     <p:spTree>
@@ -12301,7 +10797,7 @@
 </p:sld>
 </file>
 
-<file path=ppt/slides/slide55.xml><?xml version="1.0" encoding="utf-8"?>
+<file path=ppt/slides/slide47.xml><?xml version="1.0" encoding="utf-8"?>
 <p:sld xmlns:a="http://schemas.openxmlformats.org/drawingml/2006/main" xmlns:r="http://schemas.openxmlformats.org/officeDocument/2006/relationships" xmlns:p="http://schemas.openxmlformats.org/presentationml/2006/main" show="0">
   <p:cSld>
     <p:spTree>
@@ -12429,7 +10925,7 @@
 </p:sld>
 </file>
 
-<file path=ppt/slides/slide56.xml><?xml version="1.0" encoding="utf-8"?>
+<file path=ppt/slides/slide48.xml><?xml version="1.0" encoding="utf-8"?>
 <p:sld xmlns:a="http://schemas.openxmlformats.org/drawingml/2006/main" xmlns:r="http://schemas.openxmlformats.org/officeDocument/2006/relationships" xmlns:p="http://schemas.openxmlformats.org/presentationml/2006/main">
   <p:cSld>
     <p:spTree>
@@ -12592,7 +11088,7 @@
 </p:sld>
 </file>
 
-<file path=ppt/slides/slide57.xml><?xml version="1.0" encoding="utf-8"?>
+<file path=ppt/slides/slide49.xml><?xml version="1.0" encoding="utf-8"?>
 <p:sld xmlns:a="http://schemas.openxmlformats.org/drawingml/2006/main" xmlns:r="http://schemas.openxmlformats.org/officeDocument/2006/relationships" xmlns:p="http://schemas.openxmlformats.org/presentationml/2006/main">
   <p:cSld>
     <p:spTree>
@@ -12751,6 +11247,175 @@
     <p:extLst>
       <p:ext uri="{BB962C8B-B14F-4D97-AF65-F5344CB8AC3E}">
         <p14:creationId xmlns:p14="http://schemas.microsoft.com/office/powerpoint/2010/main" val="2990158245"/>
+      </p:ext>
+    </p:extLst>
+  </p:cSld>
+  <p:clrMapOvr>
+    <a:masterClrMapping/>
+  </p:clrMapOvr>
+</p:sld>
+</file>
+
+<file path=ppt/slides/slide5.xml><?xml version="1.0" encoding="utf-8"?>
+<p:sld xmlns:a="http://schemas.openxmlformats.org/drawingml/2006/main" xmlns:r="http://schemas.openxmlformats.org/officeDocument/2006/relationships" xmlns:p="http://schemas.openxmlformats.org/presentationml/2006/main">
+  <p:cSld>
+    <p:spTree>
+      <p:nvGrpSpPr>
+        <p:cNvPr id="1" name=""/>
+        <p:cNvGrpSpPr/>
+        <p:nvPr/>
+      </p:nvGrpSpPr>
+      <p:grpSpPr>
+        <a:xfrm>
+          <a:off x="0" y="0"/>
+          <a:ext cx="0" cy="0"/>
+          <a:chOff x="0" y="0"/>
+          <a:chExt cx="0" cy="0"/>
+        </a:xfrm>
+      </p:grpSpPr>
+      <p:sp>
+        <p:nvSpPr>
+          <p:cNvPr id="2" name="Title 1">
+            <a:extLst>
+              <a:ext uri="{FF2B5EF4-FFF2-40B4-BE49-F238E27FC236}">
+                <a16:creationId xmlns:a16="http://schemas.microsoft.com/office/drawing/2014/main" id="{81142A91-5257-B54B-64F1-6008D8827FCE}"/>
+              </a:ext>
+            </a:extLst>
+          </p:cNvPr>
+          <p:cNvSpPr>
+            <a:spLocks noGrp="1"/>
+          </p:cNvSpPr>
+          <p:nvPr>
+            <p:ph type="title"/>
+          </p:nvPr>
+        </p:nvSpPr>
+        <p:spPr/>
+        <p:txBody>
+          <a:bodyPr/>
+          <a:lstStyle/>
+          <a:p>
+            <a:r>
+              <a:rPr lang="en-US" dirty="0"/>
+              <a:t>Neural Network Libraries</a:t>
+            </a:r>
+          </a:p>
+        </p:txBody>
+      </p:sp>
+      <p:sp>
+        <p:nvSpPr>
+          <p:cNvPr id="3" name="Content Placeholder 2">
+            <a:extLst>
+              <a:ext uri="{FF2B5EF4-FFF2-40B4-BE49-F238E27FC236}">
+                <a16:creationId xmlns:a16="http://schemas.microsoft.com/office/drawing/2014/main" id="{EACEF73A-3D57-53DC-016E-A3B0C595C583}"/>
+              </a:ext>
+            </a:extLst>
+          </p:cNvPr>
+          <p:cNvSpPr>
+            <a:spLocks noGrp="1"/>
+          </p:cNvSpPr>
+          <p:nvPr>
+            <p:ph idx="1"/>
+          </p:nvPr>
+        </p:nvSpPr>
+        <p:spPr>
+          <a:xfrm>
+            <a:off x="1451579" y="1853754"/>
+            <a:ext cx="9603275" cy="4199727"/>
+          </a:xfrm>
+        </p:spPr>
+        <p:txBody>
+          <a:bodyPr/>
+          <a:lstStyle/>
+          <a:p>
+            <a:r>
+              <a:rPr lang="en-US" dirty="0"/>
+              <a:t>Neural networks have libraries similar to sklearn, but there are some new concerns. </a:t>
+            </a:r>
+          </a:p>
+          <a:p>
+            <a:pPr lvl="1"/>
+            <a:r>
+              <a:rPr lang="en-US" dirty="0"/>
+              <a:t>GPU acceleration – the big matrix math that is needed in neural networks is done much (much, much…) faster by GPUs (video cards) than by CPUs (regular processors). </a:t>
+            </a:r>
+          </a:p>
+          <a:p>
+            <a:r>
+              <a:rPr lang="en-US" dirty="0"/>
+              <a:t>To do any serious neural network training, we need a GPU of some sort. </a:t>
+            </a:r>
+          </a:p>
+          <a:p>
+            <a:pPr lvl="1"/>
+            <a:r>
+              <a:rPr lang="en-US" dirty="0" err="1"/>
+              <a:t>nVidia</a:t>
+            </a:r>
+            <a:r>
+              <a:rPr lang="en-US" dirty="0"/>
+              <a:t> GPUs are the king, and far beyond anything else, largely due to CUDA (next). </a:t>
+            </a:r>
+          </a:p>
+          <a:p>
+            <a:pPr lvl="1"/>
+            <a:r>
+              <a:rPr lang="en-US" dirty="0"/>
+              <a:t>Apple silicon macs have </a:t>
+            </a:r>
+            <a:r>
+              <a:rPr lang="en-US" dirty="0" err="1"/>
+              <a:t>tensorflow</a:t>
+            </a:r>
+            <a:r>
+              <a:rPr lang="en-US" dirty="0"/>
+              <a:t> acceleration that you can enable. </a:t>
+            </a:r>
+          </a:p>
+          <a:p>
+            <a:pPr lvl="1"/>
+            <a:r>
+              <a:rPr lang="en-US" dirty="0" err="1"/>
+              <a:t>Colab</a:t>
+            </a:r>
+            <a:r>
+              <a:rPr lang="en-US" dirty="0"/>
+              <a:t> (or other online workbooks) offer GPU access, </a:t>
+            </a:r>
+            <a:r>
+              <a:rPr lang="en-US" dirty="0" err="1"/>
+              <a:t>Colab</a:t>
+            </a:r>
+            <a:r>
+              <a:rPr lang="en-US" dirty="0"/>
+              <a:t> is the easiest/cheapest solution.</a:t>
+            </a:r>
+          </a:p>
+          <a:p>
+            <a:pPr lvl="1"/>
+            <a:r>
+              <a:rPr lang="en-US" dirty="0"/>
+              <a:t>Other GPUs like Radeons or Intel usually have something, but it tends to suck. </a:t>
+            </a:r>
+          </a:p>
+          <a:p>
+            <a:r>
+              <a:rPr lang="en-US" dirty="0"/>
+              <a:t>You typically install some variation of TensorFlow and get GPU friendly output. </a:t>
+            </a:r>
+          </a:p>
+          <a:p>
+            <a:pPr lvl="1"/>
+            <a:r>
+              <a:rPr lang="en-US" dirty="0"/>
+              <a:t>The GPU operations utilize some faster set of commands than ‘normal’ operations. (CUDA)</a:t>
+            </a:r>
+          </a:p>
+        </p:txBody>
+      </p:sp>
+    </p:spTree>
+    <p:extLst>
+      <p:ext uri="{BB962C8B-B14F-4D97-AF65-F5344CB8AC3E}">
+        <p14:creationId xmlns:p14="http://schemas.microsoft.com/office/powerpoint/2010/main" val="600591514"/>
       </p:ext>
     </p:extLst>
   </p:cSld>
